--- a/freelance/samples/pptx/Stress_Management_Student_Wellness.pptx
+++ b/freelance/samples/pptx/Stress_Management_Student_Wellness.pptx
@@ -512,7 +512,7 @@
           <a:lstStyle/>
           <a:p>
             <a:r>
-              <a:t>Good morning everyone. Today we examine stress management and mental wellness tailored specifically for tertiary students balancing academic rigor and personal life.</a:t>
+              <a:t>Welcome everyone. College life is demanding. Today we explore practical, evidence-based frameworks to manage academic stress, cultivate emotional resilience, and safeguard your mental wellbeing.</a:t>
             </a:r>
           </a:p>
         </p:txBody>
@@ -582,7 +582,7 @@
           <a:lstStyle/>
           <a:p>
             <a:r>
-              <a:t>To conclude: guard your health fiercely. Seek support when needed. Consistent daily balance will carry you further than frantic panic ever could.</a:t>
+              <a:t>I challenge each of you to implement this simple 7-day reset. Small consistent boundaries create transformative changes in academic vitality.</a:t>
             </a:r>
           </a:p>
         </p:txBody>
@@ -652,7 +652,7 @@
           <a:lstStyle/>
           <a:p>
             <a:r>
-              <a:t>Thank you for your time. Here are our verified psychological references from the APA, Stanford Medicine, and Jon Kabat-Zinn.</a:t>
+              <a:t>Thank you. Remember: you are a human being before you are a student. Take care of your mind, honor your limits, and achieve greatness with joy. I welcome any questions.</a:t>
             </a:r>
           </a:p>
         </p:txBody>
@@ -722,7 +722,7 @@
           <a:lstStyle/>
           <a:p>
             <a:r>
-              <a:t>Our roadmap explores the biological roots of stress, early warning signals, practical daily decompression tools, and campus support structures.</a:t>
+              <a:t>Stress is not merely emotional; it is intensely physiological. Chronic elevated cortisol directly shrinks dendrites in the hippocampus, impairing your ability to retain exam material.</a:t>
             </a:r>
           </a:p>
         </p:txBody>
@@ -792,7 +792,7 @@
           <a:lstStyle/>
           <a:p>
             <a:r>
-              <a:t>The most vital mental shift is recognizing that rest is not a reward. High performance in programming and technical disciplines requires cognitive renewal.</a:t>
+              <a:t>Many students dismiss chronic burnout as simple fatigue. It is vital to recognize the early warning symptoms before they escalate into clinical exhaustion.</a:t>
             </a:r>
           </a:p>
         </p:txBody>
@@ -862,7 +862,7 @@
           <a:lstStyle/>
           <a:p>
             <a:r>
-              <a:t>Part One examines how chronic academic deadlines activate prolonged cortisol releases that impair concentration and working memory.</a:t>
+              <a:t>Cognitive reframing is a proven psychological technique. When a panic thought arises, examine the evidence objectively and rewrite the narrative into constructive action.</a:t>
             </a:r>
           </a:p>
         </p:txBody>
@@ -932,7 +932,7 @@
           <a:lstStyle/>
           <a:p>
             <a:r>
-              <a:t>Research indicates that over 60% of students suffer chronic exam fatigue, and sleep deprivation directly degrades technical memory encoding by 40%.</a:t>
+              <a:t>These three habits cost nothing but yield immense returns. Box breathing physically signals your nervous system that you are safe, terminating acute panic within two minutes.</a:t>
             </a:r>
           </a:p>
         </p:txBody>
@@ -1002,7 +1002,7 @@
           <a:lstStyle/>
           <a:p>
             <a:r>
-              <a:t>Wellness encompasses three synchronized pillars: cognitive rest away from screens, physical vitality, and authentic emotional safety.</a:t>
+              <a:t>Sacrificing sleep to cram is a mathematical loss. All-nighters severely degrade executive functioning. Seven hours of sleep ensures your brain can actually access the material you studied.</a:t>
             </a:r>
           </a:p>
         </p:txBody>
@@ -1072,7 +1072,7 @@
           <a:lstStyle/>
           <a:p>
             <a:r>
-              <a:t>Here we contrast sustainable high performance with toxic overwork that inevitably leads to emotional collapse and academic dropout.</a:t>
+              <a:t>Sustainable academic achievement requires intentional schedule architecture. Balance is not something you find; it is something you actively schedule.</a:t>
             </a:r>
           </a:p>
         </p:txBody>
@@ -1142,7 +1142,7 @@
           <a:lstStyle/>
           <a:p>
             <a:r>
-              <a:t>Part Two provides concrete, scientifically validated self-care tools students can execute every day on campus.</a:t>
+              <a:t>Never struggle in silence. Seeking support is an act of courage, not weakness. STI WNU offers confidential counseling, and national crisis helplines are available 24 hours a day.</a:t>
             </a:r>
           </a:p>
         </p:txBody>
@@ -1212,7 +1212,7 @@
           <a:lstStyle/>
           <a:p>
             <a:r>
-              <a:t>This four-step daily protocol restores balance: morning sunlight, deep-work micro-breaks, physical movement, and an evening digital curfew.</a:t>
+              <a:t>When all three pillars are nurtured, academic performance rises naturally without the collateral damage of chronic exhaustion.</a:t>
             </a:r>
           </a:p>
         </p:txBody>
@@ -4209,7 +4209,7 @@
 </file>
 
 <file path=ppt/slides/slide1.xml><?xml version="1.0" encoding="utf-8"?>
-<p:sld xmlns:a="http://schemas.openxmlformats.org/drawingml/2006/main" xmlns:p="http://schemas.openxmlformats.org/presentationml/2006/main" xmlns:r="http://schemas.openxmlformats.org/officeDocument/2006/relationships">
+<p:sld xmlns:p14="http://schemas.microsoft.com/office/powerpoint/2010/main" xmlns:a="http://schemas.openxmlformats.org/drawingml/2006/main" xmlns:p="http://schemas.openxmlformats.org/presentationml/2006/main" xmlns:r="http://schemas.openxmlformats.org/officeDocument/2006/relationships">
   <p:cSld>
     <p:spTree>
       <p:nvGrpSpPr>
@@ -4233,7 +4233,7 @@
             <a:avLst/>
           </a:prstGeom>
           <a:solidFill>
-            <a:srgbClr val="0B1F4B"/>
+            <a:srgbClr val="1E1B4B"/>
           </a:solidFill>
           <a:ln>
             <a:noFill/>
@@ -4261,68 +4261,40 @@
           </a:p>
         </p:txBody>
       </p:sp>
-      <p:sp>
-        <p:nvSpPr>
-          <p:cNvPr id="3" name="Rounded Rectangle 2"/>
-          <p:cNvSpPr/>
+      <p:pic>
+        <p:nvPicPr>
+          <p:cNvPr id="3" name="!!Hero_Image" descr="wellness_hero.png"/>
+          <p:cNvPicPr>
+            <a:picLocks noChangeAspect="1"/>
+          </p:cNvPicPr>
           <p:nvPr/>
-        </p:nvSpPr>
-        <p:spPr>
-          <a:xfrm>
-            <a:off x="731520" y="1097280"/>
-            <a:ext cx="3474720" cy="411480"/>
-          </a:xfrm>
-          <a:prstGeom prst="roundRect">
+        </p:nvPicPr>
+        <p:blipFill>
+          <a:blip r:embed="rId2"/>
+          <a:stretch>
+            <a:fillRect/>
+          </a:stretch>
+        </p:blipFill>
+        <p:spPr>
+          <a:xfrm>
+            <a:off x="6217920" y="731520"/>
+            <a:ext cx="5303520" cy="5394960"/>
+          </a:xfrm>
+          <a:prstGeom prst="rect">
             <a:avLst/>
           </a:prstGeom>
-          <a:solidFill>
-            <a:srgbClr val="1E5BFF"/>
-          </a:solidFill>
-          <a:ln>
-            <a:noFill/>
-          </a:ln>
-        </p:spPr>
-        <p:style>
-          <a:lnRef idx="1">
-            <a:schemeClr val="accent1"/>
-          </a:lnRef>
-          <a:fillRef idx="3">
-            <a:schemeClr val="accent1"/>
-          </a:fillRef>
-          <a:effectRef idx="2">
-            <a:schemeClr val="accent1"/>
-          </a:effectRef>
-          <a:fontRef idx="minor">
-            <a:schemeClr val="lt1"/>
-          </a:fontRef>
-        </p:style>
-        <p:txBody>
-          <a:bodyPr rtlCol="0" anchor="ctr"/>
-          <a:lstStyle/>
-          <a:p>
-            <a:pPr algn="ctr">
-              <a:defRPr sz="1000" b="1">
-                <a:solidFill>
-                  <a:srgbClr val="FFFFFF"/>
-                </a:solidFill>
-              </a:defRPr>
-            </a:pPr>
-            <a:r>
-              <a:t>ACADEMIC KEYNOTE PRESENTATION</a:t>
-            </a:r>
-          </a:p>
-        </p:txBody>
-      </p:sp>
-      <p:sp>
-        <p:nvSpPr>
-          <p:cNvPr id="4" name="TextBox 3"/>
+        </p:spPr>
+      </p:pic>
+      <p:sp>
+        <p:nvSpPr>
+          <p:cNvPr id="4" name="!!Title_Card"/>
           <p:cNvSpPr txBox="1"/>
           <p:nvPr/>
         </p:nvSpPr>
         <p:spPr>
           <a:xfrm>
-            <a:off x="731520" y="1828800"/>
-            <a:ext cx="10515600" cy="2011680"/>
+            <a:off x="731520" y="1463040"/>
+            <a:ext cx="5303520" cy="4114800"/>
           </a:xfrm>
           <a:prstGeom prst="rect">
             <a:avLst/>
@@ -4330,94 +4302,57 @@
           <a:noFill/>
         </p:spPr>
         <p:txBody>
-          <a:bodyPr wrap="none">
+          <a:bodyPr wrap="square">
             <a:spAutoFit/>
           </a:bodyPr>
           <a:lstStyle/>
           <a:p>
             <a:pPr>
-              <a:defRPr sz="4000" b="1">
+              <a:defRPr sz="1200" b="1">
+                <a:solidFill>
+                  <a:srgbClr val="F97316"/>
+                </a:solidFill>
+              </a:defRPr>
+            </a:pPr>
+            <a:r>
+              <a:t>STUDENT GUIDANCE &amp; WELLNESS</a:t>
+            </a:r>
+          </a:p>
+          <a:p>
+            <a:pPr>
+              <a:defRPr sz="3600" b="1">
                 <a:solidFill>
                   <a:srgbClr val="FFFFFF"/>
                 </a:solidFill>
               </a:defRPr>
             </a:pPr>
             <a:r>
-              <a:t>Stress Management &amp; Student Wellness</a:t>
-            </a:r>
-          </a:p>
-        </p:txBody>
-      </p:sp>
-      <p:sp>
-        <p:nvSpPr>
-          <p:cNvPr id="5" name="TextBox 4"/>
-          <p:cNvSpPr txBox="1"/>
-          <p:nvPr/>
-        </p:nvSpPr>
-        <p:spPr>
-          <a:xfrm>
-            <a:off x="731520" y="3931920"/>
-            <a:ext cx="10515600" cy="914400"/>
-          </a:xfrm>
-          <a:prstGeom prst="rect">
-            <a:avLst/>
-          </a:prstGeom>
-          <a:noFill/>
-        </p:spPr>
-        <p:txBody>
-          <a:bodyPr wrap="none">
-            <a:spAutoFit/>
-          </a:bodyPr>
-          <a:lstStyle/>
+              <a:t>Stress Management and Student Wellness</a:t>
+            </a:r>
+          </a:p>
           <a:p>
             <a:pPr>
-              <a:defRPr sz="2000">
-                <a:solidFill>
-                  <a:srgbClr val="FFB703"/>
+              <a:defRPr sz="1500">
+                <a:solidFill>
+                  <a:srgbClr val="B4C8DC"/>
                 </a:solidFill>
               </a:defRPr>
             </a:pPr>
             <a:r>
-              <a:t>Building Cognitive Resilience, Emotional Balance, and Sustainable Academic Habits</a:t>
-            </a:r>
-          </a:p>
-        </p:txBody>
-      </p:sp>
-      <p:sp>
-        <p:nvSpPr>
-          <p:cNvPr id="6" name="TextBox 5"/>
-          <p:cNvSpPr txBox="1"/>
-          <p:nvPr/>
-        </p:nvSpPr>
-        <p:spPr>
-          <a:xfrm>
-            <a:off x="731520" y="5120640"/>
-            <a:ext cx="10515600" cy="914400"/>
-          </a:xfrm>
-          <a:prstGeom prst="rect">
-            <a:avLst/>
-          </a:prstGeom>
-          <a:noFill/>
-        </p:spPr>
-        <p:txBody>
-          <a:bodyPr wrap="none">
-            <a:spAutoFit/>
-          </a:bodyPr>
-          <a:lstStyle/>
-          <a:p>
+              <a:t>Evidence-Based Resilience Frameworks and Cognitive Self-Care for Academic Success</a:t>
+            </a:r>
+          </a:p>
+          <a:p>
+            <a:br/>
             <a:pPr>
-              <a:defRPr sz="1400">
-                <a:solidFill>
-                  <a:srgbClr val="94A3B8"/>
+              <a:defRPr sz="1100">
+                <a:solidFill>
+                  <a:srgbClr val="8CA0B4"/>
                 </a:solidFill>
               </a:defRPr>
             </a:pPr>
             <a:r>
-              <a:t>Presented by: Jhon Paulo V. Gascon  •  BSIT 2G</a:t>
-            </a:r>
-            <a:br/>
-            <a:r>
-              <a:t>STI West Negros University  •  Academic Year 2026–2027</a:t>
+              <a:t>Presenter: Jhon Paulo Gascon • STI West Negros University</a:t>
             </a:r>
           </a:p>
         </p:txBody>
@@ -4427,14 +4362,14 @@
   <p:clrMapOvr>
     <a:masterClrMapping/>
   </p:clrMapOvr>
-  <p:transition spd="slow">
+  <p:transition spd="med">
     <p:fade/>
   </p:transition>
 </p:sld>
 </file>
 
 <file path=ppt/slides/slide10.xml><?xml version="1.0" encoding="utf-8"?>
-<p:sld xmlns:a="http://schemas.openxmlformats.org/drawingml/2006/main" xmlns:p="http://schemas.openxmlformats.org/presentationml/2006/main" xmlns:r="http://schemas.openxmlformats.org/officeDocument/2006/relationships">
+<p:sld xmlns:p14="http://schemas.microsoft.com/office/powerpoint/2010/main" xmlns:a="http://schemas.openxmlformats.org/drawingml/2006/main" xmlns:p="http://schemas.openxmlformats.org/presentationml/2006/main" xmlns:r="http://schemas.openxmlformats.org/officeDocument/2006/relationships">
   <p:cSld>
     <p:spTree>
       <p:nvGrpSpPr>
@@ -4458,7 +4393,7 @@
             <a:avLst/>
           </a:prstGeom>
           <a:solidFill>
-            <a:srgbClr val="0B1F4B"/>
+            <a:srgbClr val="1E1B4B"/>
           </a:solidFill>
           <a:ln>
             <a:noFill/>
@@ -4494,8 +4429,8 @@
         </p:nvSpPr>
         <p:spPr>
           <a:xfrm>
-            <a:off x="731520" y="365760"/>
-            <a:ext cx="10058400" cy="365760"/>
+            <a:off x="731520" y="457200"/>
+            <a:ext cx="10698480" cy="1005840"/>
           </a:xfrm>
           <a:prstGeom prst="rect">
             <a:avLst/>
@@ -4503,7 +4438,7 @@
           <a:noFill/>
         </p:spPr>
         <p:txBody>
-          <a:bodyPr wrap="none">
+          <a:bodyPr wrap="square">
             <a:spAutoFit/>
           </a:bodyPr>
           <a:lstStyle/>
@@ -4511,106 +4446,48 @@
             <a:pPr>
               <a:defRPr sz="1100" b="1">
                 <a:solidFill>
-                  <a:srgbClr val="FFB703"/>
+                  <a:srgbClr val="F97316"/>
                 </a:solidFill>
               </a:defRPr>
             </a:pPr>
             <a:r>
-              <a:t>FINAL INSIGHTS</a:t>
-            </a:r>
-          </a:p>
-        </p:txBody>
-      </p:sp>
-      <p:sp>
-        <p:nvSpPr>
-          <p:cNvPr id="4" name="TextBox 3"/>
-          <p:cNvSpPr txBox="1"/>
-          <p:nvPr/>
-        </p:nvSpPr>
-        <p:spPr>
-          <a:xfrm>
-            <a:off x="731520" y="685800"/>
-            <a:ext cx="10515600" cy="731520"/>
-          </a:xfrm>
-          <a:prstGeom prst="rect">
-            <a:avLst/>
-          </a:prstGeom>
-          <a:noFill/>
-        </p:spPr>
-        <p:txBody>
-          <a:bodyPr wrap="none">
-            <a:spAutoFit/>
-          </a:bodyPr>
-          <a:lstStyle/>
+              <a:t>COMMITMENT</a:t>
+            </a:r>
+          </a:p>
           <a:p>
             <a:pPr>
-              <a:defRPr sz="2600" b="1">
+              <a:defRPr sz="2400" b="1">
                 <a:solidFill>
                   <a:srgbClr val="FFFFFF"/>
                 </a:solidFill>
               </a:defRPr>
             </a:pPr>
             <a:r>
-              <a:t>Summary &amp; Personal Commitment</a:t>
-            </a:r>
-          </a:p>
-        </p:txBody>
-      </p:sp>
-      <p:sp>
-        <p:nvSpPr>
-          <p:cNvPr id="5" name="TextBox 4"/>
-          <p:cNvSpPr txBox="1"/>
-          <p:nvPr/>
-        </p:nvSpPr>
-        <p:spPr>
-          <a:xfrm>
-            <a:off x="731520" y="6400800"/>
-            <a:ext cx="10728655" cy="320040"/>
-          </a:xfrm>
-          <a:prstGeom prst="rect">
-            <a:avLst/>
-          </a:prstGeom>
-          <a:noFill/>
-        </p:spPr>
-        <p:txBody>
-          <a:bodyPr wrap="none">
-            <a:spAutoFit/>
-          </a:bodyPr>
-          <a:lstStyle/>
-          <a:p>
-            <a:pPr>
-              <a:defRPr sz="900">
-                <a:solidFill>
-                  <a:srgbClr val="94A3B8"/>
-                </a:solidFill>
-              </a:defRPr>
-            </a:pPr>
-            <a:r>
-              <a:t>STI West Negros University  •  Jhon Paulo V. Gascon  •  Slide 10 of 11</a:t>
-            </a:r>
-          </a:p>
-        </p:txBody>
-      </p:sp>
-      <p:sp>
-        <p:nvSpPr>
-          <p:cNvPr id="6" name="Rounded Rectangle 5"/>
+              <a:t>Weekly Action Challenge</a:t>
+            </a:r>
+          </a:p>
+        </p:txBody>
+      </p:sp>
+      <p:sp>
+        <p:nvSpPr>
+          <p:cNvPr id="4" name="!!Card_1"/>
           <p:cNvSpPr/>
           <p:nvPr/>
         </p:nvSpPr>
         <p:spPr>
           <a:xfrm>
-            <a:off x="731520" y="1828800"/>
-            <a:ext cx="10728655" cy="1188720"/>
+            <a:off x="731520" y="1645920"/>
+            <a:ext cx="3291840" cy="4114800"/>
           </a:xfrm>
           <a:prstGeom prst="roundRect">
             <a:avLst/>
           </a:prstGeom>
           <a:solidFill>
-            <a:srgbClr val="132A66"/>
+            <a:srgbClr val="2D2669"/>
           </a:solidFill>
           <a:ln w="19050">
             <a:solidFill>
-              <a:srgbClr val="FFB703"/>
+              <a:srgbClr val="F97316"/>
             </a:solidFill>
           </a:ln>
         </p:spPr>
@@ -4629,83 +4506,54 @@
           </a:fontRef>
         </p:style>
         <p:txBody>
-          <a:bodyPr rtlCol="0" anchor="ctr"/>
-          <a:lstStyle/>
-          <a:p>
-            <a:pPr algn="ctr"/>
-          </a:p>
-        </p:txBody>
-      </p:sp>
-      <p:sp>
-        <p:nvSpPr>
-          <p:cNvPr id="7" name="TextBox 6"/>
-          <p:cNvSpPr txBox="1"/>
-          <p:nvPr/>
-        </p:nvSpPr>
-        <p:spPr>
-          <a:xfrm>
-            <a:off x="1005840" y="2011680"/>
-            <a:ext cx="10241280" cy="822960"/>
-          </a:xfrm>
-          <a:prstGeom prst="rect">
-            <a:avLst/>
-          </a:prstGeom>
-          <a:noFill/>
-        </p:spPr>
-        <p:txBody>
-          <a:bodyPr wrap="square">
-            <a:spAutoFit/>
-          </a:bodyPr>
-          <a:lstStyle/>
+          <a:bodyPr rtlCol="0" anchor="ctr" wrap="square"/>
+          <a:lstStyle/>
+          <a:p>
+            <a:pPr algn="ctr">
+              <a:defRPr b="1" sz="1500">
+                <a:solidFill>
+                  <a:srgbClr val="F97316"/>
+                </a:solidFill>
+              </a:defRPr>
+            </a:pPr>
+            <a:r>
+              <a:t>Day 1–2: Sleep Reset</a:t>
+            </a:r>
+          </a:p>
           <a:p>
             <a:pPr>
-              <a:defRPr sz="1800" b="1">
-                <a:solidFill>
-                  <a:srgbClr val="FFB703"/>
+              <a:defRPr sz="1100">
+                <a:solidFill>
+                  <a:srgbClr val="F0F0F0"/>
                 </a:solidFill>
               </a:defRPr>
             </a:pPr>
             <a:r>
-              <a:t>Guard Your Energy</a:t>
-            </a:r>
-          </a:p>
-          <a:p>
-            <a:pPr>
-              <a:spcBef>
-                <a:spcPts val="300"/>
-              </a:spcBef>
-              <a:defRPr sz="1300">
-                <a:solidFill>
-                  <a:srgbClr val="FFFFFF"/>
-                </a:solidFill>
-              </a:defRPr>
-            </a:pPr>
-            <a:r>
-              <a:t>Academic grades are temporary; your mental and physical health is permanent.</a:t>
-            </a:r>
-          </a:p>
-        </p:txBody>
-      </p:sp>
-      <p:sp>
-        <p:nvSpPr>
-          <p:cNvPr id="8" name="Rounded Rectangle 7"/>
+              <a:t>Establish a fixed 11:00 PM sleep time and remove mobile devices from arm's reach of your bed.</a:t>
+            </a:r>
+          </a:p>
+        </p:txBody>
+      </p:sp>
+      <p:sp>
+        <p:nvSpPr>
+          <p:cNvPr id="5" name="!!Card_2"/>
           <p:cNvSpPr/>
           <p:nvPr/>
         </p:nvSpPr>
         <p:spPr>
           <a:xfrm>
-            <a:off x="731520" y="3200400"/>
-            <a:ext cx="10728655" cy="1188720"/>
+            <a:off x="4389120" y="1645920"/>
+            <a:ext cx="3291840" cy="4114800"/>
           </a:xfrm>
           <a:prstGeom prst="roundRect">
             <a:avLst/>
           </a:prstGeom>
           <a:solidFill>
-            <a:srgbClr val="132A66"/>
+            <a:srgbClr val="2D2669"/>
           </a:solidFill>
           <a:ln w="19050">
             <a:solidFill>
-              <a:srgbClr val="FFB703"/>
+              <a:srgbClr val="F97316"/>
             </a:solidFill>
           </a:ln>
         </p:spPr>
@@ -4724,83 +4572,54 @@
           </a:fontRef>
         </p:style>
         <p:txBody>
-          <a:bodyPr rtlCol="0" anchor="ctr"/>
-          <a:lstStyle/>
-          <a:p>
-            <a:pPr algn="ctr"/>
-          </a:p>
-        </p:txBody>
-      </p:sp>
-      <p:sp>
-        <p:nvSpPr>
-          <p:cNvPr id="9" name="TextBox 8"/>
-          <p:cNvSpPr txBox="1"/>
-          <p:nvPr/>
-        </p:nvSpPr>
-        <p:spPr>
-          <a:xfrm>
-            <a:off x="1005840" y="3383280"/>
-            <a:ext cx="10241280" cy="822960"/>
-          </a:xfrm>
-          <a:prstGeom prst="rect">
-            <a:avLst/>
-          </a:prstGeom>
-          <a:noFill/>
-        </p:spPr>
-        <p:txBody>
-          <a:bodyPr wrap="square">
-            <a:spAutoFit/>
-          </a:bodyPr>
-          <a:lstStyle/>
+          <a:bodyPr rtlCol="0" anchor="ctr" wrap="square"/>
+          <a:lstStyle/>
+          <a:p>
+            <a:pPr algn="ctr">
+              <a:defRPr b="1" sz="1500">
+                <a:solidFill>
+                  <a:srgbClr val="F97316"/>
+                </a:solidFill>
+              </a:defRPr>
+            </a:pPr>
+            <a:r>
+              <a:t>Day 3–4: Time-Box Study</a:t>
+            </a:r>
+          </a:p>
           <a:p>
             <a:pPr>
-              <a:defRPr sz="1800" b="1">
-                <a:solidFill>
-                  <a:srgbClr val="FFB703"/>
+              <a:defRPr sz="1100">
+                <a:solidFill>
+                  <a:srgbClr val="F0F0F0"/>
                 </a:solidFill>
               </a:defRPr>
             </a:pPr>
             <a:r>
-              <a:t>Normalize Seeking Help</a:t>
-            </a:r>
-          </a:p>
-          <a:p>
-            <a:pPr>
-              <a:spcBef>
-                <a:spcPts val="300"/>
-              </a:spcBef>
-              <a:defRPr sz="1300">
-                <a:solidFill>
-                  <a:srgbClr val="FFFFFF"/>
-                </a:solidFill>
-              </a:defRPr>
-            </a:pPr>
-            <a:r>
-              <a:t>Campus counselors and guidance faculty are partners in your success.</a:t>
-            </a:r>
-          </a:p>
-        </p:txBody>
-      </p:sp>
-      <p:sp>
-        <p:nvSpPr>
-          <p:cNvPr id="10" name="Rounded Rectangle 9"/>
+              <a:t>Apply 25-minute Pomodoro intervals during programming sprints with zero browser multitasking.</a:t>
+            </a:r>
+          </a:p>
+        </p:txBody>
+      </p:sp>
+      <p:sp>
+        <p:nvSpPr>
+          <p:cNvPr id="6" name="!!Card_3"/>
           <p:cNvSpPr/>
           <p:nvPr/>
         </p:nvSpPr>
         <p:spPr>
           <a:xfrm>
-            <a:off x="731520" y="4572000"/>
-            <a:ext cx="10728655" cy="1188720"/>
+            <a:off x="8046720" y="1645920"/>
+            <a:ext cx="3291840" cy="4114800"/>
           </a:xfrm>
           <a:prstGeom prst="roundRect">
             <a:avLst/>
           </a:prstGeom>
           <a:solidFill>
-            <a:srgbClr val="132A66"/>
+            <a:srgbClr val="2D2669"/>
           </a:solidFill>
           <a:ln w="19050">
             <a:solidFill>
-              <a:srgbClr val="FFB703"/>
+              <a:srgbClr val="F97316"/>
             </a:solidFill>
           </a:ln>
         </p:spPr>
@@ -4819,59 +4638,30 @@
           </a:fontRef>
         </p:style>
         <p:txBody>
-          <a:bodyPr rtlCol="0" anchor="ctr"/>
-          <a:lstStyle/>
-          <a:p>
-            <a:pPr algn="ctr"/>
-          </a:p>
-        </p:txBody>
-      </p:sp>
-      <p:sp>
-        <p:nvSpPr>
-          <p:cNvPr id="11" name="TextBox 10"/>
-          <p:cNvSpPr txBox="1"/>
-          <p:nvPr/>
-        </p:nvSpPr>
-        <p:spPr>
-          <a:xfrm>
-            <a:off x="1005840" y="4754880"/>
-            <a:ext cx="10241280" cy="822960"/>
-          </a:xfrm>
-          <a:prstGeom prst="rect">
-            <a:avLst/>
-          </a:prstGeom>
-          <a:noFill/>
-        </p:spPr>
-        <p:txBody>
-          <a:bodyPr wrap="square">
-            <a:spAutoFit/>
-          </a:bodyPr>
-          <a:lstStyle/>
+          <a:bodyPr rtlCol="0" anchor="ctr" wrap="square"/>
+          <a:lstStyle/>
+          <a:p>
+            <a:pPr algn="ctr">
+              <a:defRPr b="1" sz="1500">
+                <a:solidFill>
+                  <a:srgbClr val="F97316"/>
+                </a:solidFill>
+              </a:defRPr>
+            </a:pPr>
+            <a:r>
+              <a:t>Day 5–7: Reconnect</a:t>
+            </a:r>
+          </a:p>
           <a:p>
             <a:pPr>
-              <a:defRPr sz="1800" b="1">
-                <a:solidFill>
-                  <a:srgbClr val="FFB703"/>
+              <a:defRPr sz="1100">
+                <a:solidFill>
+                  <a:srgbClr val="F0F0F0"/>
                 </a:solidFill>
               </a:defRPr>
             </a:pPr>
             <a:r>
-              <a:t>Take It One Day at a Time</a:t>
-            </a:r>
-          </a:p>
-          <a:p>
-            <a:pPr>
-              <a:spcBef>
-                <a:spcPts val="300"/>
-              </a:spcBef>
-              <a:defRPr sz="1300">
-                <a:solidFill>
-                  <a:srgbClr val="FFFFFF"/>
-                </a:solidFill>
-              </a:defRPr>
-            </a:pPr>
-            <a:r>
-              <a:t>Consistency in small healthy habits outperforms frantic emergency cramming.</a:t>
+              <a:t>Have an in-person meal with friends without checking academic group chats or notifications.</a:t>
             </a:r>
           </a:p>
         </p:txBody>
@@ -4888,7 +4678,7 @@
 </file>
 
 <file path=ppt/slides/slide11.xml><?xml version="1.0" encoding="utf-8"?>
-<p:sld xmlns:a="http://schemas.openxmlformats.org/drawingml/2006/main" xmlns:p="http://schemas.openxmlformats.org/presentationml/2006/main" xmlns:r="http://schemas.openxmlformats.org/officeDocument/2006/relationships">
+<p:sld xmlns:p14="http://schemas.microsoft.com/office/powerpoint/2010/main" xmlns:a="http://schemas.openxmlformats.org/drawingml/2006/main" xmlns:p="http://schemas.openxmlformats.org/presentationml/2006/main" xmlns:r="http://schemas.openxmlformats.org/officeDocument/2006/relationships">
   <p:cSld>
     <p:spTree>
       <p:nvGrpSpPr>
@@ -4912,7 +4702,7 @@
             <a:avLst/>
           </a:prstGeom>
           <a:solidFill>
-            <a:srgbClr val="0B1F4B"/>
+            <a:srgbClr val="1E1B4B"/>
           </a:solidFill>
           <a:ln>
             <a:noFill/>
@@ -4940,16 +4730,40 @@
           </a:p>
         </p:txBody>
       </p:sp>
-      <p:sp>
-        <p:nvSpPr>
-          <p:cNvPr id="3" name="TextBox 2"/>
+      <p:pic>
+        <p:nvPicPr>
+          <p:cNvPr id="3" name="!!Hero_Image" descr="wellness_closing.png"/>
+          <p:cNvPicPr>
+            <a:picLocks noChangeAspect="1"/>
+          </p:cNvPicPr>
+          <p:nvPr/>
+        </p:nvPicPr>
+        <p:blipFill>
+          <a:blip r:embed="rId2"/>
+          <a:stretch>
+            <a:fillRect/>
+          </a:stretch>
+        </p:blipFill>
+        <p:spPr>
+          <a:xfrm>
+            <a:off x="6217920" y="731520"/>
+            <a:ext cx="5303520" cy="5394960"/>
+          </a:xfrm>
+          <a:prstGeom prst="rect">
+            <a:avLst/>
+          </a:prstGeom>
+        </p:spPr>
+      </p:pic>
+      <p:sp>
+        <p:nvSpPr>
+          <p:cNvPr id="4" name="!!Title_Card"/>
           <p:cNvSpPr txBox="1"/>
           <p:nvPr/>
         </p:nvSpPr>
         <p:spPr>
           <a:xfrm>
-            <a:off x="731520" y="365760"/>
-            <a:ext cx="10058400" cy="365760"/>
+            <a:off x="731520" y="1463040"/>
+            <a:ext cx="5303520" cy="4114800"/>
           </a:xfrm>
           <a:prstGeom prst="rect">
             <a:avLst/>
@@ -4957,812 +4771,57 @@
           <a:noFill/>
         </p:spPr>
         <p:txBody>
-          <a:bodyPr wrap="none">
-            <a:spAutoFit/>
-          </a:bodyPr>
-          <a:lstStyle/>
-          <a:p>
-            <a:pPr>
-              <a:defRPr sz="1100" b="1">
-                <a:solidFill>
-                  <a:srgbClr val="FFB703"/>
-                </a:solidFill>
-              </a:defRPr>
-            </a:pPr>
-            <a:r>
-              <a:t>SCHOLARLY DOCUMENTATION</a:t>
-            </a:r>
-          </a:p>
-        </p:txBody>
-      </p:sp>
-      <p:sp>
-        <p:nvSpPr>
-          <p:cNvPr id="4" name="TextBox 3"/>
-          <p:cNvSpPr txBox="1"/>
-          <p:nvPr/>
-        </p:nvSpPr>
-        <p:spPr>
-          <a:xfrm>
-            <a:off x="731520" y="685800"/>
-            <a:ext cx="10515600" cy="731520"/>
-          </a:xfrm>
-          <a:prstGeom prst="rect">
-            <a:avLst/>
-          </a:prstGeom>
-          <a:noFill/>
-        </p:spPr>
-        <p:txBody>
-          <a:bodyPr wrap="none">
-            <a:spAutoFit/>
-          </a:bodyPr>
-          <a:lstStyle/>
-          <a:p>
-            <a:pPr>
-              <a:defRPr sz="2600" b="1">
-                <a:solidFill>
-                  <a:srgbClr val="FFFFFF"/>
-                </a:solidFill>
-              </a:defRPr>
-            </a:pPr>
-            <a:r>
-              <a:t>Psychological References &amp; Literature</a:t>
-            </a:r>
-          </a:p>
-        </p:txBody>
-      </p:sp>
-      <p:sp>
-        <p:nvSpPr>
-          <p:cNvPr id="5" name="TextBox 4"/>
-          <p:cNvSpPr txBox="1"/>
-          <p:nvPr/>
-        </p:nvSpPr>
-        <p:spPr>
-          <a:xfrm>
-            <a:off x="731520" y="6400800"/>
-            <a:ext cx="10728655" cy="320040"/>
-          </a:xfrm>
-          <a:prstGeom prst="rect">
-            <a:avLst/>
-          </a:prstGeom>
-          <a:noFill/>
-        </p:spPr>
-        <p:txBody>
-          <a:bodyPr wrap="none">
-            <a:spAutoFit/>
-          </a:bodyPr>
-          <a:lstStyle/>
-          <a:p>
-            <a:pPr>
-              <a:defRPr sz="900">
-                <a:solidFill>
-                  <a:srgbClr val="94A3B8"/>
-                </a:solidFill>
-              </a:defRPr>
-            </a:pPr>
-            <a:r>
-              <a:t>STI West Negros University  •  Jhon Paulo V. Gascon  •  Slide 11 of 11</a:t>
-            </a:r>
-          </a:p>
-        </p:txBody>
-      </p:sp>
-      <p:sp>
-        <p:nvSpPr>
-          <p:cNvPr id="6" name="Rounded Rectangle 5"/>
-          <p:cNvSpPr/>
-          <p:nvPr/>
-        </p:nvSpPr>
-        <p:spPr>
-          <a:xfrm>
-            <a:off x="731520" y="1828800"/>
-            <a:ext cx="10728655" cy="4114800"/>
-          </a:xfrm>
-          <a:prstGeom prst="roundRect">
-            <a:avLst/>
-          </a:prstGeom>
-          <a:solidFill>
-            <a:srgbClr val="132A66"/>
-          </a:solidFill>
-          <a:ln w="12700">
-            <a:solidFill>
-              <a:srgbClr val="94A3B8"/>
-            </a:solidFill>
-          </a:ln>
-        </p:spPr>
-        <p:style>
-          <a:lnRef idx="1">
-            <a:schemeClr val="accent1"/>
-          </a:lnRef>
-          <a:fillRef idx="3">
-            <a:schemeClr val="accent1"/>
-          </a:fillRef>
-          <a:effectRef idx="2">
-            <a:schemeClr val="accent1"/>
-          </a:effectRef>
-          <a:fontRef idx="minor">
-            <a:schemeClr val="lt1"/>
-          </a:fontRef>
-        </p:style>
-        <p:txBody>
-          <a:bodyPr rtlCol="0" anchor="ctr"/>
-          <a:lstStyle/>
-          <a:p>
-            <a:pPr algn="ctr"/>
-          </a:p>
-        </p:txBody>
-      </p:sp>
-      <p:sp>
-        <p:nvSpPr>
-          <p:cNvPr id="7" name="TextBox 6"/>
-          <p:cNvSpPr txBox="1"/>
-          <p:nvPr/>
-        </p:nvSpPr>
-        <p:spPr>
-          <a:xfrm>
-            <a:off x="1097280" y="2103120"/>
-            <a:ext cx="10058400" cy="3566160"/>
-          </a:xfrm>
-          <a:prstGeom prst="rect">
-            <a:avLst/>
-          </a:prstGeom>
-          <a:noFill/>
-        </p:spPr>
-        <p:txBody>
           <a:bodyPr wrap="square">
             <a:spAutoFit/>
           </a:bodyPr>
           <a:lstStyle/>
           <a:p>
             <a:pPr>
-              <a:spcBef>
-                <a:spcPts val="1400"/>
-              </a:spcBef>
-              <a:defRPr sz="1300">
+              <a:defRPr sz="3200" b="1">
                 <a:solidFill>
                   <a:srgbClr val="FFFFFF"/>
                 </a:solidFill>
               </a:defRPr>
             </a:pPr>
             <a:r>
-              <a:t>•  American Psychological Association. (2022). College student mental health survey report. APA Center for Psychology.</a:t>
+              <a:t>Prioritize Your Mental Health</a:t>
             </a:r>
           </a:p>
           <a:p>
             <a:pPr>
-              <a:spcBef>
-                <a:spcPts val="1400"/>
-              </a:spcBef>
-              <a:defRPr sz="1300">
-                <a:solidFill>
-                  <a:srgbClr val="FFFFFF"/>
+              <a:defRPr sz="1400">
+                <a:solidFill>
+                  <a:srgbClr val="F97316"/>
                 </a:solidFill>
               </a:defRPr>
             </a:pPr>
             <a:r>
-              <a:t>•  Huberman, A. (2021). Neural mechanisms of stress, vision, and autonomic regulation. Stanford University School of Medicine.</a:t>
-            </a:r>
-          </a:p>
-          <a:p>
+              <a:t>Academic Excellence Begins with a Nurtured, Rested Mind</a:t>
+            </a:r>
+          </a:p>
+          <a:p>
+            <a:br/>
             <a:pPr>
-              <a:spcBef>
-                <a:spcPts val="1400"/>
-              </a:spcBef>
-              <a:defRPr sz="1300">
-                <a:solidFill>
-                  <a:srgbClr val="FFFFFF"/>
+              <a:defRPr sz="1000">
+                <a:solidFill>
+                  <a:srgbClr val="96AABE"/>
                 </a:solidFill>
               </a:defRPr>
             </a:pPr>
             <a:r>
-              <a:t>•  Kabat-Zinn, J. (2013). Full catastrophe living: Using the wisdom of your body and mind to face stress. Bantam Books.</a:t>
-            </a:r>
-          </a:p>
-        </p:txBody>
-      </p:sp>
-    </p:spTree>
-  </p:cSld>
-  <p:clrMapOvr>
-    <a:masterClrMapping/>
-  </p:clrMapOvr>
-  <p:transition spd="slow">
-    <p:fade/>
-  </p:transition>
-</p:sld>
-</file>
-
-<file path=ppt/slides/slide2.xml><?xml version="1.0" encoding="utf-8"?>
-<p:sld xmlns:a="http://schemas.openxmlformats.org/drawingml/2006/main" xmlns:p="http://schemas.openxmlformats.org/presentationml/2006/main" xmlns:r="http://schemas.openxmlformats.org/officeDocument/2006/relationships">
-  <p:cSld>
-    <p:spTree>
-      <p:nvGrpSpPr>
-        <p:cNvPr id="1" name=""/>
-        <p:cNvGrpSpPr/>
-        <p:nvPr/>
-      </p:nvGrpSpPr>
-      <p:grpSpPr/>
-      <p:sp>
-        <p:nvSpPr>
-          <p:cNvPr id="2" name="Rectangle 1"/>
-          <p:cNvSpPr/>
-          <p:nvPr/>
-        </p:nvSpPr>
-        <p:spPr>
-          <a:xfrm>
-            <a:off x="0" y="0"/>
-            <a:ext cx="12191695" cy="6858000"/>
-          </a:xfrm>
-          <a:prstGeom prst="rect">
-            <a:avLst/>
-          </a:prstGeom>
-          <a:solidFill>
-            <a:srgbClr val="0B1F4B"/>
-          </a:solidFill>
-          <a:ln>
-            <a:noFill/>
-          </a:ln>
-        </p:spPr>
-        <p:style>
-          <a:lnRef idx="1">
-            <a:schemeClr val="accent1"/>
-          </a:lnRef>
-          <a:fillRef idx="3">
-            <a:schemeClr val="accent1"/>
-          </a:fillRef>
-          <a:effectRef idx="2">
-            <a:schemeClr val="accent1"/>
-          </a:effectRef>
-          <a:fontRef idx="minor">
-            <a:schemeClr val="lt1"/>
-          </a:fontRef>
-        </p:style>
-        <p:txBody>
-          <a:bodyPr rtlCol="0" anchor="ctr"/>
-          <a:lstStyle/>
-          <a:p>
-            <a:pPr algn="ctr"/>
-          </a:p>
-        </p:txBody>
-      </p:sp>
-      <p:sp>
-        <p:nvSpPr>
-          <p:cNvPr id="3" name="TextBox 2"/>
-          <p:cNvSpPr txBox="1"/>
-          <p:nvPr/>
-        </p:nvSpPr>
-        <p:spPr>
-          <a:xfrm>
-            <a:off x="731520" y="365760"/>
-            <a:ext cx="10058400" cy="365760"/>
-          </a:xfrm>
-          <a:prstGeom prst="rect">
-            <a:avLst/>
-          </a:prstGeom>
-          <a:noFill/>
-        </p:spPr>
-        <p:txBody>
-          <a:bodyPr wrap="none">
-            <a:spAutoFit/>
-          </a:bodyPr>
-          <a:lstStyle/>
-          <a:p>
-            <a:pPr>
-              <a:defRPr sz="1100" b="1">
-                <a:solidFill>
-                  <a:srgbClr val="FFB703"/>
-                </a:solidFill>
-              </a:defRPr>
-            </a:pPr>
-            <a:r>
-              <a:t>STRUCTURE &amp; OVERVIEW</a:t>
-            </a:r>
-          </a:p>
-        </p:txBody>
-      </p:sp>
-      <p:sp>
-        <p:nvSpPr>
-          <p:cNvPr id="4" name="TextBox 3"/>
-          <p:cNvSpPr txBox="1"/>
-          <p:nvPr/>
-        </p:nvSpPr>
-        <p:spPr>
-          <a:xfrm>
-            <a:off x="731520" y="685800"/>
-            <a:ext cx="10515600" cy="731520"/>
-          </a:xfrm>
-          <a:prstGeom prst="rect">
-            <a:avLst/>
-          </a:prstGeom>
-          <a:noFill/>
-        </p:spPr>
-        <p:txBody>
-          <a:bodyPr wrap="none">
-            <a:spAutoFit/>
-          </a:bodyPr>
-          <a:lstStyle/>
-          <a:p>
-            <a:pPr>
-              <a:defRPr sz="2600" b="1">
-                <a:solidFill>
-                  <a:srgbClr val="FFFFFF"/>
-                </a:solidFill>
-              </a:defRPr>
-            </a:pPr>
-            <a:r>
-              <a:t>Presentation Roadmap</a:t>
-            </a:r>
-          </a:p>
-        </p:txBody>
-      </p:sp>
-      <p:sp>
-        <p:nvSpPr>
-          <p:cNvPr id="5" name="TextBox 4"/>
-          <p:cNvSpPr txBox="1"/>
-          <p:nvPr/>
-        </p:nvSpPr>
-        <p:spPr>
-          <a:xfrm>
-            <a:off x="731520" y="6400800"/>
-            <a:ext cx="10728655" cy="320040"/>
-          </a:xfrm>
-          <a:prstGeom prst="rect">
-            <a:avLst/>
-          </a:prstGeom>
-          <a:noFill/>
-        </p:spPr>
-        <p:txBody>
-          <a:bodyPr wrap="none">
-            <a:spAutoFit/>
-          </a:bodyPr>
-          <a:lstStyle/>
-          <a:p>
-            <a:pPr>
-              <a:defRPr sz="900">
-                <a:solidFill>
-                  <a:srgbClr val="94A3B8"/>
-                </a:solidFill>
-              </a:defRPr>
-            </a:pPr>
-            <a:r>
-              <a:t>STI West Negros University  •  Jhon Paulo V. Gascon  •  Slide 2 of 11</a:t>
-            </a:r>
-          </a:p>
-        </p:txBody>
-      </p:sp>
-      <p:sp>
-        <p:nvSpPr>
-          <p:cNvPr id="6" name="Rounded Rectangle 5"/>
-          <p:cNvSpPr/>
-          <p:nvPr/>
-        </p:nvSpPr>
-        <p:spPr>
-          <a:xfrm>
-            <a:off x="731520" y="1828800"/>
-            <a:ext cx="2514600" cy="4114800"/>
-          </a:xfrm>
-          <a:prstGeom prst="roundRect">
-            <a:avLst/>
-          </a:prstGeom>
-          <a:solidFill>
-            <a:srgbClr val="132A66"/>
-          </a:solidFill>
-          <a:ln w="19050">
-            <a:solidFill>
-              <a:srgbClr val="FFB703"/>
-            </a:solidFill>
-          </a:ln>
-        </p:spPr>
-        <p:style>
-          <a:lnRef idx="1">
-            <a:schemeClr val="accent1"/>
-          </a:lnRef>
-          <a:fillRef idx="3">
-            <a:schemeClr val="accent1"/>
-          </a:fillRef>
-          <a:effectRef idx="2">
-            <a:schemeClr val="accent1"/>
-          </a:effectRef>
-          <a:fontRef idx="minor">
-            <a:schemeClr val="lt1"/>
-          </a:fontRef>
-        </p:style>
-        <p:txBody>
-          <a:bodyPr rtlCol="0" anchor="ctr"/>
-          <a:lstStyle/>
-          <a:p>
-            <a:pPr algn="ctr"/>
-          </a:p>
-        </p:txBody>
-      </p:sp>
-      <p:sp>
-        <p:nvSpPr>
-          <p:cNvPr id="7" name="TextBox 6"/>
-          <p:cNvSpPr txBox="1"/>
-          <p:nvPr/>
-        </p:nvSpPr>
-        <p:spPr>
-          <a:xfrm>
-            <a:off x="914400" y="2103120"/>
-            <a:ext cx="2148840" cy="3474720"/>
-          </a:xfrm>
-          <a:prstGeom prst="rect">
-            <a:avLst/>
-          </a:prstGeom>
-          <a:noFill/>
-        </p:spPr>
-        <p:txBody>
-          <a:bodyPr wrap="square">
-            <a:spAutoFit/>
-          </a:bodyPr>
-          <a:lstStyle/>
-          <a:p>
-            <a:pPr>
-              <a:defRPr sz="3600" b="1">
-                <a:solidFill>
-                  <a:srgbClr val="FFB703"/>
-                </a:solidFill>
-              </a:defRPr>
-            </a:pPr>
-            <a:r>
-              <a:t>01</a:t>
-            </a:r>
-          </a:p>
-          <a:p>
-            <a:pPr>
-              <a:spcBef>
-                <a:spcPts val="1400"/>
-              </a:spcBef>
-              <a:defRPr sz="1600" b="1">
-                <a:solidFill>
-                  <a:srgbClr val="FFFFFF"/>
-                </a:solidFill>
-              </a:defRPr>
-            </a:pPr>
-            <a:r>
-              <a:t>The Physiology of Stress</a:t>
-            </a:r>
-          </a:p>
-          <a:p>
-            <a:pPr>
-              <a:spcBef>
-                <a:spcPts val="1000"/>
-              </a:spcBef>
-              <a:defRPr sz="1300">
-                <a:solidFill>
-                  <a:srgbClr val="94A3B8"/>
-                </a:solidFill>
-              </a:defRPr>
-            </a:pPr>
-            <a:r>
-              <a:t>Understanding cortisol, fight-or-flight, and cognitive burnout</a:t>
-            </a:r>
-          </a:p>
-        </p:txBody>
-      </p:sp>
-      <p:sp>
-        <p:nvSpPr>
-          <p:cNvPr id="8" name="Rounded Rectangle 7"/>
-          <p:cNvSpPr/>
-          <p:nvPr/>
-        </p:nvSpPr>
-        <p:spPr>
-          <a:xfrm>
-            <a:off x="3429000" y="1828800"/>
-            <a:ext cx="2514600" cy="4114800"/>
-          </a:xfrm>
-          <a:prstGeom prst="roundRect">
-            <a:avLst/>
-          </a:prstGeom>
-          <a:solidFill>
-            <a:srgbClr val="132A66"/>
-          </a:solidFill>
-          <a:ln w="19050">
-            <a:solidFill>
-              <a:srgbClr val="FFB703"/>
-            </a:solidFill>
-          </a:ln>
-        </p:spPr>
-        <p:style>
-          <a:lnRef idx="1">
-            <a:schemeClr val="accent1"/>
-          </a:lnRef>
-          <a:fillRef idx="3">
-            <a:schemeClr val="accent1"/>
-          </a:fillRef>
-          <a:effectRef idx="2">
-            <a:schemeClr val="accent1"/>
-          </a:effectRef>
-          <a:fontRef idx="minor">
-            <a:schemeClr val="lt1"/>
-          </a:fontRef>
-        </p:style>
-        <p:txBody>
-          <a:bodyPr rtlCol="0" anchor="ctr"/>
-          <a:lstStyle/>
-          <a:p>
-            <a:pPr algn="ctr"/>
-          </a:p>
-        </p:txBody>
-      </p:sp>
-      <p:sp>
-        <p:nvSpPr>
-          <p:cNvPr id="9" name="TextBox 8"/>
-          <p:cNvSpPr txBox="1"/>
-          <p:nvPr/>
-        </p:nvSpPr>
-        <p:spPr>
-          <a:xfrm>
-            <a:off x="3611880" y="2103120"/>
-            <a:ext cx="2148840" cy="3474720"/>
-          </a:xfrm>
-          <a:prstGeom prst="rect">
-            <a:avLst/>
-          </a:prstGeom>
-          <a:noFill/>
-        </p:spPr>
-        <p:txBody>
-          <a:bodyPr wrap="square">
-            <a:spAutoFit/>
-          </a:bodyPr>
-          <a:lstStyle/>
-          <a:p>
-            <a:pPr>
-              <a:defRPr sz="3600" b="1">
-                <a:solidFill>
-                  <a:srgbClr val="FFB703"/>
-                </a:solidFill>
-              </a:defRPr>
-            </a:pPr>
-            <a:r>
-              <a:t>02</a:t>
-            </a:r>
-          </a:p>
-          <a:p>
-            <a:pPr>
-              <a:spcBef>
-                <a:spcPts val="1400"/>
-              </a:spcBef>
-              <a:defRPr sz="1600" b="1">
-                <a:solidFill>
-                  <a:srgbClr val="FFFFFF"/>
-                </a:solidFill>
-              </a:defRPr>
-            </a:pPr>
-            <a:r>
-              <a:t>Academic Burnout Signals</a:t>
-            </a:r>
-          </a:p>
-          <a:p>
-            <a:pPr>
-              <a:spcBef>
-                <a:spcPts val="1000"/>
-              </a:spcBef>
-              <a:defRPr sz="1300">
-                <a:solidFill>
-                  <a:srgbClr val="94A3B8"/>
-                </a:solidFill>
-              </a:defRPr>
-            </a:pPr>
-            <a:r>
-              <a:t>Identifying somatic, behavioral, and emotional warning signs</a:t>
-            </a:r>
-          </a:p>
-        </p:txBody>
-      </p:sp>
-      <p:sp>
-        <p:nvSpPr>
-          <p:cNvPr id="10" name="Rounded Rectangle 9"/>
-          <p:cNvSpPr/>
-          <p:nvPr/>
-        </p:nvSpPr>
-        <p:spPr>
-          <a:xfrm>
-            <a:off x="6126480" y="1828800"/>
-            <a:ext cx="2514600" cy="4114800"/>
-          </a:xfrm>
-          <a:prstGeom prst="roundRect">
-            <a:avLst/>
-          </a:prstGeom>
-          <a:solidFill>
-            <a:srgbClr val="132A66"/>
-          </a:solidFill>
-          <a:ln w="19050">
-            <a:solidFill>
-              <a:srgbClr val="FFB703"/>
-            </a:solidFill>
-          </a:ln>
-        </p:spPr>
-        <p:style>
-          <a:lnRef idx="1">
-            <a:schemeClr val="accent1"/>
-          </a:lnRef>
-          <a:fillRef idx="3">
-            <a:schemeClr val="accent1"/>
-          </a:fillRef>
-          <a:effectRef idx="2">
-            <a:schemeClr val="accent1"/>
-          </a:effectRef>
-          <a:fontRef idx="minor">
-            <a:schemeClr val="lt1"/>
-          </a:fontRef>
-        </p:style>
-        <p:txBody>
-          <a:bodyPr rtlCol="0" anchor="ctr"/>
-          <a:lstStyle/>
-          <a:p>
-            <a:pPr algn="ctr"/>
-          </a:p>
-        </p:txBody>
-      </p:sp>
-      <p:sp>
-        <p:nvSpPr>
-          <p:cNvPr id="11" name="TextBox 10"/>
-          <p:cNvSpPr txBox="1"/>
-          <p:nvPr/>
-        </p:nvSpPr>
-        <p:spPr>
-          <a:xfrm>
-            <a:off x="6309360" y="2103120"/>
-            <a:ext cx="2148840" cy="3474720"/>
-          </a:xfrm>
-          <a:prstGeom prst="rect">
-            <a:avLst/>
-          </a:prstGeom>
-          <a:noFill/>
-        </p:spPr>
-        <p:txBody>
-          <a:bodyPr wrap="square">
-            <a:spAutoFit/>
-          </a:bodyPr>
-          <a:lstStyle/>
-          <a:p>
-            <a:pPr>
-              <a:defRPr sz="3600" b="1">
-                <a:solidFill>
-                  <a:srgbClr val="FFB703"/>
-                </a:solidFill>
-              </a:defRPr>
-            </a:pPr>
-            <a:r>
-              <a:t>03</a:t>
-            </a:r>
-          </a:p>
-          <a:p>
-            <a:pPr>
-              <a:spcBef>
-                <a:spcPts val="1400"/>
-              </a:spcBef>
-              <a:defRPr sz="1600" b="1">
-                <a:solidFill>
-                  <a:srgbClr val="FFFFFF"/>
-                </a:solidFill>
-              </a:defRPr>
-            </a:pPr>
-            <a:r>
-              <a:t>Daily Resilience Tools</a:t>
-            </a:r>
-          </a:p>
-          <a:p>
-            <a:pPr>
-              <a:spcBef>
-                <a:spcPts val="1000"/>
-              </a:spcBef>
-              <a:defRPr sz="1300">
-                <a:solidFill>
-                  <a:srgbClr val="94A3B8"/>
-                </a:solidFill>
-              </a:defRPr>
-            </a:pPr>
-            <a:r>
-              <a:t>Box breathing, boundary setting, and intentional digital detox</a:t>
-            </a:r>
-          </a:p>
-        </p:txBody>
-      </p:sp>
-      <p:sp>
-        <p:nvSpPr>
-          <p:cNvPr id="12" name="Rounded Rectangle 11"/>
-          <p:cNvSpPr/>
-          <p:nvPr/>
-        </p:nvSpPr>
-        <p:spPr>
-          <a:xfrm>
-            <a:off x="8823960" y="1828800"/>
-            <a:ext cx="2514600" cy="4114800"/>
-          </a:xfrm>
-          <a:prstGeom prst="roundRect">
-            <a:avLst/>
-          </a:prstGeom>
-          <a:solidFill>
-            <a:srgbClr val="132A66"/>
-          </a:solidFill>
-          <a:ln w="19050">
-            <a:solidFill>
-              <a:srgbClr val="FFB703"/>
-            </a:solidFill>
-          </a:ln>
-        </p:spPr>
-        <p:style>
-          <a:lnRef idx="1">
-            <a:schemeClr val="accent1"/>
-          </a:lnRef>
-          <a:fillRef idx="3">
-            <a:schemeClr val="accent1"/>
-          </a:fillRef>
-          <a:effectRef idx="2">
-            <a:schemeClr val="accent1"/>
-          </a:effectRef>
-          <a:fontRef idx="minor">
-            <a:schemeClr val="lt1"/>
-          </a:fontRef>
-        </p:style>
-        <p:txBody>
-          <a:bodyPr rtlCol="0" anchor="ctr"/>
-          <a:lstStyle/>
-          <a:p>
-            <a:pPr algn="ctr"/>
-          </a:p>
-        </p:txBody>
-      </p:sp>
-      <p:sp>
-        <p:nvSpPr>
-          <p:cNvPr id="13" name="TextBox 12"/>
-          <p:cNvSpPr txBox="1"/>
-          <p:nvPr/>
-        </p:nvSpPr>
-        <p:spPr>
-          <a:xfrm>
-            <a:off x="9006840" y="2103120"/>
-            <a:ext cx="2148840" cy="3474720"/>
-          </a:xfrm>
-          <a:prstGeom prst="rect">
-            <a:avLst/>
-          </a:prstGeom>
-          <a:noFill/>
-        </p:spPr>
-        <p:txBody>
-          <a:bodyPr wrap="square">
-            <a:spAutoFit/>
-          </a:bodyPr>
-          <a:lstStyle/>
-          <a:p>
-            <a:pPr>
-              <a:defRPr sz="3600" b="1">
-                <a:solidFill>
-                  <a:srgbClr val="FFB703"/>
-                </a:solidFill>
-              </a:defRPr>
-            </a:pPr>
-            <a:r>
-              <a:t>04</a:t>
-            </a:r>
-          </a:p>
-          <a:p>
-            <a:pPr>
-              <a:spcBef>
-                <a:spcPts val="1400"/>
-              </a:spcBef>
-              <a:defRPr sz="1600" b="1">
-                <a:solidFill>
-                  <a:srgbClr val="FFFFFF"/>
-                </a:solidFill>
-              </a:defRPr>
-            </a:pPr>
-            <a:r>
-              <a:t>Building Campus Support Circles</a:t>
-            </a:r>
-          </a:p>
-          <a:p>
-            <a:pPr>
-              <a:spcBef>
-                <a:spcPts val="1000"/>
-              </a:spcBef>
-              <a:defRPr sz="1300">
-                <a:solidFill>
-                  <a:srgbClr val="94A3B8"/>
-                </a:solidFill>
-              </a:defRPr>
-            </a:pPr>
-            <a:r>
-              <a:t>Peer networks, counseling, and sustainable lifestyle pacing</a:t>
+              <a:t>Image &amp; Academic Credits:</a:t>
+            </a:r>
+            <a:br/>
+            <a:r>
+              <a:t>• Visual Assets: Custom 3D renders &amp; high-res vector graphics.</a:t>
+            </a:r>
+            <a:br/>
+            <a:r>
+              <a:t>• Research Citations: APA 7th academic standards.</a:t>
+            </a:r>
+            <a:br/>
+            <a:r>
+              <a:t>• STI West Negros University • BSIT Program 2026–2027</a:t>
             </a:r>
           </a:p>
         </p:txBody>
@@ -5778,8 +4837,8 @@
 </p:sld>
 </file>
 
-<file path=ppt/slides/slide3.xml><?xml version="1.0" encoding="utf-8"?>
-<p:sld xmlns:a="http://schemas.openxmlformats.org/drawingml/2006/main" xmlns:p="http://schemas.openxmlformats.org/presentationml/2006/main" xmlns:r="http://schemas.openxmlformats.org/officeDocument/2006/relationships">
+<file path=ppt/slides/slide2.xml><?xml version="1.0" encoding="utf-8"?>
+<p:sld xmlns:p14="http://schemas.microsoft.com/office/powerpoint/2010/main" xmlns:a="http://schemas.openxmlformats.org/drawingml/2006/main" xmlns:p="http://schemas.openxmlformats.org/presentationml/2006/main" xmlns:r="http://schemas.openxmlformats.org/officeDocument/2006/relationships">
   <p:cSld>
     <p:spTree>
       <p:nvGrpSpPr>
@@ -5803,7 +4862,7 @@
             <a:avLst/>
           </a:prstGeom>
           <a:solidFill>
-            <a:srgbClr val="0B1F4B"/>
+            <a:srgbClr val="1E1B4B"/>
           </a:solidFill>
           <a:ln>
             <a:noFill/>
@@ -5839,8 +4898,8 @@
         </p:nvSpPr>
         <p:spPr>
           <a:xfrm>
-            <a:off x="731520" y="365760"/>
-            <a:ext cx="10058400" cy="365760"/>
+            <a:off x="731520" y="457200"/>
+            <a:ext cx="10698480" cy="1005840"/>
           </a:xfrm>
           <a:prstGeom prst="rect">
             <a:avLst/>
@@ -5848,7 +4907,7 @@
           <a:noFill/>
         </p:spPr>
         <p:txBody>
-          <a:bodyPr wrap="none">
+          <a:bodyPr wrap="square">
             <a:spAutoFit/>
           </a:bodyPr>
           <a:lstStyle/>
@@ -5856,106 +4915,72 @@
             <a:pPr>
               <a:defRPr sz="1100" b="1">
                 <a:solidFill>
-                  <a:srgbClr val="FFB703"/>
+                  <a:srgbClr val="F97316"/>
                 </a:solidFill>
               </a:defRPr>
             </a:pPr>
             <a:r>
-              <a:t>KEY TAKEAWAY</a:t>
-            </a:r>
-          </a:p>
-        </p:txBody>
-      </p:sp>
-      <p:sp>
-        <p:nvSpPr>
-          <p:cNvPr id="4" name="TextBox 3"/>
-          <p:cNvSpPr txBox="1"/>
+              <a:t>PHYSIOLOGICAL SCIENCE</a:t>
+            </a:r>
+          </a:p>
+          <a:p>
+            <a:pPr>
+              <a:defRPr sz="2400" b="1">
+                <a:solidFill>
+                  <a:srgbClr val="FFFFFF"/>
+                </a:solidFill>
+              </a:defRPr>
+            </a:pPr>
+            <a:r>
+              <a:t>The Neurobiology of Academic Stress</a:t>
+            </a:r>
+          </a:p>
+        </p:txBody>
+      </p:sp>
+      <p:pic>
+        <p:nvPicPr>
+          <p:cNvPr id="4" name="!!Content_Image" descr="wellness_science.png"/>
+          <p:cNvPicPr>
+            <a:picLocks noChangeAspect="1"/>
+          </p:cNvPicPr>
           <p:nvPr/>
-        </p:nvSpPr>
-        <p:spPr>
-          <a:xfrm>
-            <a:off x="731520" y="685800"/>
-            <a:ext cx="10515600" cy="731520"/>
+        </p:nvPicPr>
+        <p:blipFill>
+          <a:blip r:embed="rId2"/>
+          <a:stretch>
+            <a:fillRect/>
+          </a:stretch>
+        </p:blipFill>
+        <p:spPr>
+          <a:xfrm>
+            <a:off x="731520" y="1645920"/>
+            <a:ext cx="5029200" cy="4389120"/>
           </a:xfrm>
           <a:prstGeom prst="rect">
             <a:avLst/>
           </a:prstGeom>
-          <a:noFill/>
-        </p:spPr>
-        <p:txBody>
-          <a:bodyPr wrap="none">
-            <a:spAutoFit/>
-          </a:bodyPr>
-          <a:lstStyle/>
-          <a:p>
-            <a:pPr>
-              <a:defRPr sz="2600" b="1">
-                <a:solidFill>
-                  <a:srgbClr val="FFFFFF"/>
-                </a:solidFill>
-              </a:defRPr>
-            </a:pPr>
-            <a:r>
-              <a:t>Core Conceptual Thesis</a:t>
-            </a:r>
-          </a:p>
-        </p:txBody>
-      </p:sp>
-      <p:sp>
-        <p:nvSpPr>
-          <p:cNvPr id="5" name="TextBox 4"/>
-          <p:cNvSpPr txBox="1"/>
-          <p:nvPr/>
-        </p:nvSpPr>
-        <p:spPr>
-          <a:xfrm>
-            <a:off x="731520" y="6400800"/>
-            <a:ext cx="10728655" cy="320040"/>
-          </a:xfrm>
-          <a:prstGeom prst="rect">
-            <a:avLst/>
-          </a:prstGeom>
-          <a:noFill/>
-        </p:spPr>
-        <p:txBody>
-          <a:bodyPr wrap="none">
-            <a:spAutoFit/>
-          </a:bodyPr>
-          <a:lstStyle/>
-          <a:p>
-            <a:pPr>
-              <a:defRPr sz="900">
-                <a:solidFill>
-                  <a:srgbClr val="94A3B8"/>
-                </a:solidFill>
-              </a:defRPr>
-            </a:pPr>
-            <a:r>
-              <a:t>STI West Negros University  •  Jhon Paulo V. Gascon  •  Slide 3 of 11</a:t>
-            </a:r>
-          </a:p>
-        </p:txBody>
-      </p:sp>
-      <p:sp>
-        <p:nvSpPr>
-          <p:cNvPr id="6" name="Rounded Rectangle 5"/>
+        </p:spPr>
+      </p:pic>
+      <p:sp>
+        <p:nvSpPr>
+          <p:cNvPr id="5" name="!!Card_1"/>
           <p:cNvSpPr/>
           <p:nvPr/>
         </p:nvSpPr>
         <p:spPr>
           <a:xfrm>
-            <a:off x="731520" y="1828800"/>
-            <a:ext cx="10728655" cy="4114800"/>
+            <a:off x="6126480" y="1645920"/>
+            <a:ext cx="5303520" cy="1280160"/>
           </a:xfrm>
           <a:prstGeom prst="roundRect">
             <a:avLst/>
           </a:prstGeom>
           <a:solidFill>
-            <a:srgbClr val="132A66"/>
+            <a:srgbClr val="2D2669"/>
           </a:solidFill>
-          <a:ln w="25400">
+          <a:ln w="12700">
             <a:solidFill>
-              <a:srgbClr val="1E5BFF"/>
+              <a:srgbClr val="F97316"/>
             </a:solidFill>
           </a:ln>
         </p:spPr>
@@ -5974,6 +4999,232 @@
           </a:fontRef>
         </p:style>
         <p:txBody>
+          <a:bodyPr rtlCol="0" anchor="ctr" wrap="square"/>
+          <a:lstStyle/>
+          <a:p>
+            <a:pPr algn="ctr">
+              <a:defRPr b="1" sz="1300">
+                <a:solidFill>
+                  <a:srgbClr val="FFFFFF"/>
+                </a:solidFill>
+              </a:defRPr>
+            </a:pPr>
+            <a:r>
+              <a:t>The Cortisol Response Loop</a:t>
+            </a:r>
+          </a:p>
+          <a:p>
+            <a:pPr>
+              <a:defRPr sz="1050">
+                <a:solidFill>
+                  <a:srgbClr val="F5F0FF"/>
+                </a:solidFill>
+              </a:defRPr>
+            </a:pPr>
+            <a:r>
+              <a:t>Academic deadlines activate the amygdala, triggering sustained cortisol secretion that impairs hippocampal memory.</a:t>
+            </a:r>
+          </a:p>
+        </p:txBody>
+      </p:sp>
+      <p:sp>
+        <p:nvSpPr>
+          <p:cNvPr id="6" name="!!Card_2"/>
+          <p:cNvSpPr/>
+          <p:nvPr/>
+        </p:nvSpPr>
+        <p:spPr>
+          <a:xfrm>
+            <a:off x="6126480" y="3108960"/>
+            <a:ext cx="5303520" cy="1280160"/>
+          </a:xfrm>
+          <a:prstGeom prst="roundRect">
+            <a:avLst/>
+          </a:prstGeom>
+          <a:solidFill>
+            <a:srgbClr val="2D2669"/>
+          </a:solidFill>
+          <a:ln w="12700">
+            <a:solidFill>
+              <a:srgbClr val="F97316"/>
+            </a:solidFill>
+          </a:ln>
+        </p:spPr>
+        <p:style>
+          <a:lnRef idx="1">
+            <a:schemeClr val="accent1"/>
+          </a:lnRef>
+          <a:fillRef idx="3">
+            <a:schemeClr val="accent1"/>
+          </a:fillRef>
+          <a:effectRef idx="2">
+            <a:schemeClr val="accent1"/>
+          </a:effectRef>
+          <a:fontRef idx="minor">
+            <a:schemeClr val="lt1"/>
+          </a:fontRef>
+        </p:style>
+        <p:txBody>
+          <a:bodyPr rtlCol="0" anchor="ctr" wrap="square"/>
+          <a:lstStyle/>
+          <a:p>
+            <a:pPr algn="ctr">
+              <a:defRPr b="1" sz="1300">
+                <a:solidFill>
+                  <a:srgbClr val="FFFFFF"/>
+                </a:solidFill>
+              </a:defRPr>
+            </a:pPr>
+            <a:r>
+              <a:t>Acute vs. Chronic Strain</a:t>
+            </a:r>
+          </a:p>
+          <a:p>
+            <a:pPr>
+              <a:defRPr sz="1050">
+                <a:solidFill>
+                  <a:srgbClr val="F5F0FF"/>
+                </a:solidFill>
+              </a:defRPr>
+            </a:pPr>
+            <a:r>
+              <a:t>Short stress spikes sharpen exam alertness, but chronic unmanaged tension triggers neurochemical exhaustion.</a:t>
+            </a:r>
+          </a:p>
+        </p:txBody>
+      </p:sp>
+      <p:sp>
+        <p:nvSpPr>
+          <p:cNvPr id="7" name="!!Card_3"/>
+          <p:cNvSpPr/>
+          <p:nvPr/>
+        </p:nvSpPr>
+        <p:spPr>
+          <a:xfrm>
+            <a:off x="6126480" y="4572000"/>
+            <a:ext cx="5303520" cy="1280160"/>
+          </a:xfrm>
+          <a:prstGeom prst="roundRect">
+            <a:avLst/>
+          </a:prstGeom>
+          <a:solidFill>
+            <a:srgbClr val="2D2669"/>
+          </a:solidFill>
+          <a:ln w="12700">
+            <a:solidFill>
+              <a:srgbClr val="F97316"/>
+            </a:solidFill>
+          </a:ln>
+        </p:spPr>
+        <p:style>
+          <a:lnRef idx="1">
+            <a:schemeClr val="accent1"/>
+          </a:lnRef>
+          <a:fillRef idx="3">
+            <a:schemeClr val="accent1"/>
+          </a:fillRef>
+          <a:effectRef idx="2">
+            <a:schemeClr val="accent1"/>
+          </a:effectRef>
+          <a:fontRef idx="minor">
+            <a:schemeClr val="lt1"/>
+          </a:fontRef>
+        </p:style>
+        <p:txBody>
+          <a:bodyPr rtlCol="0" anchor="ctr" wrap="square"/>
+          <a:lstStyle/>
+          <a:p>
+            <a:pPr algn="ctr">
+              <a:defRPr b="1" sz="1300">
+                <a:solidFill>
+                  <a:srgbClr val="FFFFFF"/>
+                </a:solidFill>
+              </a:defRPr>
+            </a:pPr>
+            <a:r>
+              <a:t>The Recovery Buffer Requirement</a:t>
+            </a:r>
+          </a:p>
+          <a:p>
+            <a:pPr>
+              <a:defRPr sz="1050">
+                <a:solidFill>
+                  <a:srgbClr val="F5F0FF"/>
+                </a:solidFill>
+              </a:defRPr>
+            </a:pPr>
+            <a:r>
+              <a:t>Brain synaptic consolidation requires intentional restorative down-time between study blocks.</a:t>
+            </a:r>
+          </a:p>
+        </p:txBody>
+      </p:sp>
+    </p:spTree>
+  </p:cSld>
+  <p:clrMapOvr>
+    <a:masterClrMapping/>
+  </p:clrMapOvr>
+  <mc:AlternateContent xmlns:mc="http://schemas.openxmlformats.org/markup-compatibility/2006">
+    <mc:Choice xmlns:p159="http://schemas.microsoft.com/office/powerpoint/2015/09/main" Requires="p159">
+      <p:transition spd="slow" p14:dur="1500">
+        <p159:morph option="byObject"/>
+      </p:transition>
+    </mc:Choice>
+    <mc:Fallback>
+      <p:transition spd="slow">
+        <p:fade/>
+      </p:transition>
+    </mc:Fallback>
+  </mc:AlternateContent>
+</p:sld>
+</file>
+
+<file path=ppt/slides/slide3.xml><?xml version="1.0" encoding="utf-8"?>
+<p:sld xmlns:p14="http://schemas.microsoft.com/office/powerpoint/2010/main" xmlns:a="http://schemas.openxmlformats.org/drawingml/2006/main" xmlns:p="http://schemas.openxmlformats.org/presentationml/2006/main" xmlns:r="http://schemas.openxmlformats.org/officeDocument/2006/relationships">
+  <p:cSld>
+    <p:spTree>
+      <p:nvGrpSpPr>
+        <p:cNvPr id="1" name=""/>
+        <p:cNvGrpSpPr/>
+        <p:nvPr/>
+      </p:nvGrpSpPr>
+      <p:grpSpPr/>
+      <p:sp>
+        <p:nvSpPr>
+          <p:cNvPr id="2" name="Rectangle 1"/>
+          <p:cNvSpPr/>
+          <p:nvPr/>
+        </p:nvSpPr>
+        <p:spPr>
+          <a:xfrm>
+            <a:off x="0" y="0"/>
+            <a:ext cx="12191695" cy="6858000"/>
+          </a:xfrm>
+          <a:prstGeom prst="rect">
+            <a:avLst/>
+          </a:prstGeom>
+          <a:solidFill>
+            <a:srgbClr val="1E1B4B"/>
+          </a:solidFill>
+          <a:ln>
+            <a:noFill/>
+          </a:ln>
+        </p:spPr>
+        <p:style>
+          <a:lnRef idx="1">
+            <a:schemeClr val="accent1"/>
+          </a:lnRef>
+          <a:fillRef idx="3">
+            <a:schemeClr val="accent1"/>
+          </a:fillRef>
+          <a:effectRef idx="2">
+            <a:schemeClr val="accent1"/>
+          </a:effectRef>
+          <a:fontRef idx="minor">
+            <a:schemeClr val="lt1"/>
+          </a:fontRef>
+        </p:style>
+        <p:txBody>
           <a:bodyPr rtlCol="0" anchor="ctr"/>
           <a:lstStyle/>
           <a:p>
@@ -5981,16 +5232,40 @@
           </a:p>
         </p:txBody>
       </p:sp>
-      <p:sp>
-        <p:nvSpPr>
-          <p:cNvPr id="7" name="TextBox 6"/>
+      <p:pic>
+        <p:nvPicPr>
+          <p:cNvPr id="3" name="!!Hero_Image" descr="wellness_symptoms.png"/>
+          <p:cNvPicPr>
+            <a:picLocks noChangeAspect="1"/>
+          </p:cNvPicPr>
+          <p:nvPr/>
+        </p:nvPicPr>
+        <p:blipFill>
+          <a:blip r:embed="rId2"/>
+          <a:stretch>
+            <a:fillRect/>
+          </a:stretch>
+        </p:blipFill>
+        <p:spPr>
+          <a:xfrm>
+            <a:off x="731520" y="914400"/>
+            <a:ext cx="5029200" cy="5029200"/>
+          </a:xfrm>
+          <a:prstGeom prst="rect">
+            <a:avLst/>
+          </a:prstGeom>
+        </p:spPr>
+      </p:pic>
+      <p:sp>
+        <p:nvSpPr>
+          <p:cNvPr id="4" name="!!Title_Card"/>
           <p:cNvSpPr txBox="1"/>
           <p:nvPr/>
         </p:nvSpPr>
         <p:spPr>
           <a:xfrm>
-            <a:off x="1371600" y="2743200"/>
-            <a:ext cx="9448495" cy="2286000"/>
+            <a:off x="6217920" y="2011680"/>
+            <a:ext cx="5303520" cy="3200400"/>
           </a:xfrm>
           <a:prstGeom prst="rect">
             <a:avLst/>
@@ -6003,15 +5278,27 @@
           </a:bodyPr>
           <a:lstStyle/>
           <a:p>
-            <a:pPr algn="ctr">
-              <a:defRPr sz="3400" b="1">
-                <a:solidFill>
-                  <a:srgbClr val="FFB703"/>
+            <a:pPr>
+              <a:defRPr sz="3200" b="1">
+                <a:solidFill>
+                  <a:srgbClr val="FFFFFF"/>
                 </a:solidFill>
               </a:defRPr>
             </a:pPr>
             <a:r>
-              <a:t>"Rest is not a reward you earn after collapse. It is a biological prerequisite for sustained excellence."</a:t>
+              <a:t>Recognizing Academic Burnout</a:t>
+            </a:r>
+          </a:p>
+          <a:p>
+            <a:pPr>
+              <a:defRPr sz="1600">
+                <a:solidFill>
+                  <a:srgbClr val="F97316"/>
+                </a:solidFill>
+              </a:defRPr>
+            </a:pPr>
+            <a:r>
+              <a:t>Distinguishing Healthy Academic Deadlines from Emotional Collapse</a:t>
             </a:r>
           </a:p>
         </p:txBody>
@@ -6028,7 +5315,7 @@
 </file>
 
 <file path=ppt/slides/slide4.xml><?xml version="1.0" encoding="utf-8"?>
-<p:sld xmlns:a="http://schemas.openxmlformats.org/drawingml/2006/main" xmlns:p="http://schemas.openxmlformats.org/presentationml/2006/main" xmlns:r="http://schemas.openxmlformats.org/officeDocument/2006/relationships">
+<p:sld xmlns:p14="http://schemas.microsoft.com/office/powerpoint/2010/main" xmlns:a="http://schemas.openxmlformats.org/drawingml/2006/main" xmlns:p="http://schemas.openxmlformats.org/presentationml/2006/main" xmlns:r="http://schemas.openxmlformats.org/officeDocument/2006/relationships">
   <p:cSld>
     <p:spTree>
       <p:nvGrpSpPr>
@@ -6052,7 +5339,7 @@
             <a:avLst/>
           </a:prstGeom>
           <a:solidFill>
-            <a:srgbClr val="0B1F4B"/>
+            <a:srgbClr val="1E1B4B"/>
           </a:solidFill>
           <a:ln>
             <a:noFill/>
@@ -6088,8 +5375,8 @@
         </p:nvSpPr>
         <p:spPr>
           <a:xfrm>
-            <a:off x="731520" y="6400800"/>
-            <a:ext cx="10728655" cy="320040"/>
+            <a:off x="731520" y="457200"/>
+            <a:ext cx="10698480" cy="1005840"/>
           </a:xfrm>
           <a:prstGeom prst="rect">
             <a:avLst/>
@@ -6097,43 +5384,81 @@
           <a:noFill/>
         </p:spPr>
         <p:txBody>
-          <a:bodyPr wrap="none">
+          <a:bodyPr wrap="square">
             <a:spAutoFit/>
           </a:bodyPr>
           <a:lstStyle/>
           <a:p>
             <a:pPr>
-              <a:defRPr sz="900">
-                <a:solidFill>
-                  <a:srgbClr val="94A3B8"/>
+              <a:defRPr sz="1100" b="1">
+                <a:solidFill>
+                  <a:srgbClr val="F97316"/>
                 </a:solidFill>
               </a:defRPr>
             </a:pPr>
             <a:r>
-              <a:t>STI West Negros University  •  Jhon Paulo V. Gascon  •  Slide 4 of 11</a:t>
-            </a:r>
-          </a:p>
-        </p:txBody>
-      </p:sp>
-      <p:sp>
-        <p:nvSpPr>
-          <p:cNvPr id="4" name="Rectangle 3"/>
-          <p:cNvSpPr/>
+              <a:t>PSYCHOLOGICAL SCAFFOLDING</a:t>
+            </a:r>
+          </a:p>
+          <a:p>
+            <a:pPr>
+              <a:defRPr sz="2400" b="1">
+                <a:solidFill>
+                  <a:srgbClr val="FFFFFF"/>
+                </a:solidFill>
+              </a:defRPr>
+            </a:pPr>
+            <a:r>
+              <a:t>Cognitive Reframing Techniques</a:t>
+            </a:r>
+          </a:p>
+        </p:txBody>
+      </p:sp>
+      <p:pic>
+        <p:nvPicPr>
+          <p:cNvPr id="4" name="!!Content_Image" descr="wellness_reframing.png"/>
+          <p:cNvPicPr>
+            <a:picLocks noChangeAspect="1"/>
+          </p:cNvPicPr>
           <p:nvPr/>
-        </p:nvSpPr>
-        <p:spPr>
-          <a:xfrm>
-            <a:off x="731520" y="2286000"/>
-            <a:ext cx="457200" cy="2560320"/>
+        </p:nvPicPr>
+        <p:blipFill>
+          <a:blip r:embed="rId2"/>
+          <a:stretch>
+            <a:fillRect/>
+          </a:stretch>
+        </p:blipFill>
+        <p:spPr>
+          <a:xfrm>
+            <a:off x="731520" y="1645920"/>
+            <a:ext cx="5029200" cy="4389120"/>
           </a:xfrm>
           <a:prstGeom prst="rect">
             <a:avLst/>
           </a:prstGeom>
+        </p:spPr>
+      </p:pic>
+      <p:sp>
+        <p:nvSpPr>
+          <p:cNvPr id="5" name="!!Card_1"/>
+          <p:cNvSpPr/>
+          <p:nvPr/>
+        </p:nvSpPr>
+        <p:spPr>
+          <a:xfrm>
+            <a:off x="6126480" y="1645920"/>
+            <a:ext cx="5303520" cy="1280160"/>
+          </a:xfrm>
+          <a:prstGeom prst="roundRect">
+            <a:avLst/>
+          </a:prstGeom>
           <a:solidFill>
-            <a:srgbClr val="FFB703"/>
+            <a:srgbClr val="2D2669"/>
           </a:solidFill>
-          <a:ln>
-            <a:noFill/>
+          <a:ln w="12700">
+            <a:solidFill>
+              <a:srgbClr val="F97316"/>
+            </a:solidFill>
           </a:ln>
         </p:spPr>
         <p:style>
@@ -6151,79 +5476,162 @@
           </a:fontRef>
         </p:style>
         <p:txBody>
-          <a:bodyPr rtlCol="0" anchor="ctr"/>
-          <a:lstStyle/>
-          <a:p>
-            <a:pPr algn="ctr"/>
-          </a:p>
-        </p:txBody>
-      </p:sp>
-      <p:sp>
-        <p:nvSpPr>
-          <p:cNvPr id="5" name="TextBox 4"/>
-          <p:cNvSpPr txBox="1"/>
+          <a:bodyPr rtlCol="0" anchor="ctr" wrap="square"/>
+          <a:lstStyle/>
+          <a:p>
+            <a:pPr algn="ctr">
+              <a:defRPr b="1" sz="1300">
+                <a:solidFill>
+                  <a:srgbClr val="FFFFFF"/>
+                </a:solidFill>
+              </a:defRPr>
+            </a:pPr>
+            <a:r>
+              <a:t>Challenging Catastrophic Thoughts</a:t>
+            </a:r>
+          </a:p>
+          <a:p>
+            <a:pPr>
+              <a:defRPr sz="1050">
+                <a:solidFill>
+                  <a:srgbClr val="F5F0FF"/>
+                </a:solidFill>
+              </a:defRPr>
+            </a:pPr>
+            <a:r>
+              <a:t>Replace 'If I fail this midterm my entire career is destroyed' with 'This is one assessment that indicates areas for targeted revision.'</a:t>
+            </a:r>
+          </a:p>
+        </p:txBody>
+      </p:sp>
+      <p:sp>
+        <p:nvSpPr>
+          <p:cNvPr id="6" name="!!Card_2"/>
+          <p:cNvSpPr/>
           <p:nvPr/>
         </p:nvSpPr>
         <p:spPr>
           <a:xfrm>
-            <a:off x="1463040" y="2194560"/>
-            <a:ext cx="9601200" cy="1371600"/>
-          </a:xfrm>
-          <a:prstGeom prst="rect">
+            <a:off x="6126480" y="3108960"/>
+            <a:ext cx="5303520" cy="1280160"/>
+          </a:xfrm>
+          <a:prstGeom prst="roundRect">
             <a:avLst/>
           </a:prstGeom>
-          <a:noFill/>
-        </p:spPr>
-        <p:txBody>
-          <a:bodyPr wrap="none">
-            <a:spAutoFit/>
-          </a:bodyPr>
-          <a:lstStyle/>
+          <a:solidFill>
+            <a:srgbClr val="2D2669"/>
+          </a:solidFill>
+          <a:ln w="12700">
+            <a:solidFill>
+              <a:srgbClr val="F97316"/>
+            </a:solidFill>
+          </a:ln>
+        </p:spPr>
+        <p:style>
+          <a:lnRef idx="1">
+            <a:schemeClr val="accent1"/>
+          </a:lnRef>
+          <a:fillRef idx="3">
+            <a:schemeClr val="accent1"/>
+          </a:fillRef>
+          <a:effectRef idx="2">
+            <a:schemeClr val="accent1"/>
+          </a:effectRef>
+          <a:fontRef idx="minor">
+            <a:schemeClr val="lt1"/>
+          </a:fontRef>
+        </p:style>
+        <p:txBody>
+          <a:bodyPr rtlCol="0" anchor="ctr" wrap="square"/>
+          <a:lstStyle/>
+          <a:p>
+            <a:pPr algn="ctr">
+              <a:defRPr b="1" sz="1300">
+                <a:solidFill>
+                  <a:srgbClr val="FFFFFF"/>
+                </a:solidFill>
+              </a:defRPr>
+            </a:pPr>
+            <a:r>
+              <a:t>Separating Worth from Grades</a:t>
+            </a:r>
+          </a:p>
           <a:p>
             <a:pPr>
-              <a:defRPr sz="3800" b="1">
-                <a:solidFill>
-                  <a:srgbClr val="FFFFFF"/>
+              <a:defRPr sz="1050">
+                <a:solidFill>
+                  <a:srgbClr val="F5F0FF"/>
                 </a:solidFill>
               </a:defRPr>
             </a:pPr>
             <a:r>
-              <a:t>Part I: The Science of Academic Stress</a:t>
-            </a:r>
-          </a:p>
-        </p:txBody>
-      </p:sp>
-      <p:sp>
-        <p:nvSpPr>
-          <p:cNvPr id="6" name="TextBox 5"/>
-          <p:cNvSpPr txBox="1"/>
+              <a:t>Your human value and creative potential are not defined by a numerical GPA scorecard.</a:t>
+            </a:r>
+          </a:p>
+        </p:txBody>
+      </p:sp>
+      <p:sp>
+        <p:nvSpPr>
+          <p:cNvPr id="7" name="!!Card_3"/>
+          <p:cNvSpPr/>
           <p:nvPr/>
         </p:nvSpPr>
         <p:spPr>
           <a:xfrm>
-            <a:off x="1463040" y="3657600"/>
-            <a:ext cx="9601200" cy="1371600"/>
-          </a:xfrm>
-          <a:prstGeom prst="rect">
+            <a:off x="6126480" y="4572000"/>
+            <a:ext cx="5303520" cy="1280160"/>
+          </a:xfrm>
+          <a:prstGeom prst="roundRect">
             <a:avLst/>
           </a:prstGeom>
-          <a:noFill/>
-        </p:spPr>
-        <p:txBody>
-          <a:bodyPr wrap="none">
-            <a:spAutoFit/>
-          </a:bodyPr>
-          <a:lstStyle/>
+          <a:solidFill>
+            <a:srgbClr val="2D2669"/>
+          </a:solidFill>
+          <a:ln w="12700">
+            <a:solidFill>
+              <a:srgbClr val="F97316"/>
+            </a:solidFill>
+          </a:ln>
+        </p:spPr>
+        <p:style>
+          <a:lnRef idx="1">
+            <a:schemeClr val="accent1"/>
+          </a:lnRef>
+          <a:fillRef idx="3">
+            <a:schemeClr val="accent1"/>
+          </a:fillRef>
+          <a:effectRef idx="2">
+            <a:schemeClr val="accent1"/>
+          </a:effectRef>
+          <a:fontRef idx="minor">
+            <a:schemeClr val="lt1"/>
+          </a:fontRef>
+        </p:style>
+        <p:txBody>
+          <a:bodyPr rtlCol="0" anchor="ctr" wrap="square"/>
+          <a:lstStyle/>
+          <a:p>
+            <a:pPr algn="ctr">
+              <a:defRPr b="1" sz="1300">
+                <a:solidFill>
+                  <a:srgbClr val="FFFFFF"/>
+                </a:solidFill>
+              </a:defRPr>
+            </a:pPr>
+            <a:r>
+              <a:t>The Growth Mindset Protocol</a:t>
+            </a:r>
+          </a:p>
           <a:p>
             <a:pPr>
-              <a:defRPr sz="2200">
-                <a:solidFill>
-                  <a:srgbClr val="94A3B8"/>
+              <a:defRPr sz="1050">
+                <a:solidFill>
+                  <a:srgbClr val="F5F0FF"/>
                 </a:solidFill>
               </a:defRPr>
             </a:pPr>
             <a:r>
-              <a:t>Why high-intensity coursework triggers neurological exhaustion.</a:t>
+              <a:t>Reframe mistakes in coding or mathematics as diagnostic feedback rather than personal inadequacy.</a:t>
             </a:r>
           </a:p>
         </p:txBody>
@@ -6233,14 +5641,23 @@
   <p:clrMapOvr>
     <a:masterClrMapping/>
   </p:clrMapOvr>
-  <p:transition spd="med">
-    <p:push dir="u"/>
-  </p:transition>
+  <mc:AlternateContent xmlns:mc="http://schemas.openxmlformats.org/markup-compatibility/2006">
+    <mc:Choice xmlns:p159="http://schemas.microsoft.com/office/powerpoint/2015/09/main" Requires="p159">
+      <p:transition spd="slow" p14:dur="1500">
+        <p159:morph option="byObject"/>
+      </p:transition>
+    </mc:Choice>
+    <mc:Fallback>
+      <p:transition spd="slow">
+        <p:fade/>
+      </p:transition>
+    </mc:Fallback>
+  </mc:AlternateContent>
 </p:sld>
 </file>
 
 <file path=ppt/slides/slide5.xml><?xml version="1.0" encoding="utf-8"?>
-<p:sld xmlns:a="http://schemas.openxmlformats.org/drawingml/2006/main" xmlns:p="http://schemas.openxmlformats.org/presentationml/2006/main" xmlns:r="http://schemas.openxmlformats.org/officeDocument/2006/relationships">
+<p:sld xmlns:p14="http://schemas.microsoft.com/office/powerpoint/2010/main" xmlns:a="http://schemas.openxmlformats.org/drawingml/2006/main" xmlns:p="http://schemas.openxmlformats.org/presentationml/2006/main" xmlns:r="http://schemas.openxmlformats.org/officeDocument/2006/relationships">
   <p:cSld>
     <p:spTree>
       <p:nvGrpSpPr>
@@ -6264,7 +5681,7 @@
             <a:avLst/>
           </a:prstGeom>
           <a:solidFill>
-            <a:srgbClr val="0B1F4B"/>
+            <a:srgbClr val="1E1B4B"/>
           </a:solidFill>
           <a:ln>
             <a:noFill/>
@@ -6300,8 +5717,8 @@
         </p:nvSpPr>
         <p:spPr>
           <a:xfrm>
-            <a:off x="731520" y="365760"/>
-            <a:ext cx="10058400" cy="365760"/>
+            <a:off x="731520" y="457200"/>
+            <a:ext cx="10698480" cy="1005840"/>
           </a:xfrm>
           <a:prstGeom prst="rect">
             <a:avLst/>
@@ -6309,7 +5726,7 @@
           <a:noFill/>
         </p:spPr>
         <p:txBody>
-          <a:bodyPr wrap="none">
+          <a:bodyPr wrap="square">
             <a:spAutoFit/>
           </a:bodyPr>
           <a:lstStyle/>
@@ -6317,106 +5734,48 @@
             <a:pPr>
               <a:defRPr sz="1100" b="1">
                 <a:solidFill>
-                  <a:srgbClr val="FFB703"/>
+                  <a:srgbClr val="F97316"/>
                 </a:solidFill>
               </a:defRPr>
             </a:pPr>
             <a:r>
-              <a:t>EMPIRICAL EVIDENCE &amp; TRENDS</a:t>
-            </a:r>
-          </a:p>
-        </p:txBody>
-      </p:sp>
-      <p:sp>
-        <p:nvSpPr>
-          <p:cNvPr id="4" name="TextBox 3"/>
-          <p:cNvSpPr txBox="1"/>
-          <p:nvPr/>
-        </p:nvSpPr>
-        <p:spPr>
-          <a:xfrm>
-            <a:off x="731520" y="685800"/>
-            <a:ext cx="10515600" cy="731520"/>
-          </a:xfrm>
-          <a:prstGeom prst="rect">
-            <a:avLst/>
-          </a:prstGeom>
-          <a:noFill/>
-        </p:spPr>
-        <p:txBody>
-          <a:bodyPr wrap="none">
-            <a:spAutoFit/>
-          </a:bodyPr>
-          <a:lstStyle/>
+              <a:t>DAILY PRACTICES</a:t>
+            </a:r>
+          </a:p>
           <a:p>
             <a:pPr>
-              <a:defRPr sz="2600" b="1">
+              <a:defRPr sz="2400" b="1">
                 <a:solidFill>
                   <a:srgbClr val="FFFFFF"/>
                 </a:solidFill>
               </a:defRPr>
             </a:pPr>
             <a:r>
-              <a:t>Student Wellness Analytics</a:t>
-            </a:r>
-          </a:p>
-        </p:txBody>
-      </p:sp>
-      <p:sp>
-        <p:nvSpPr>
-          <p:cNvPr id="5" name="TextBox 4"/>
-          <p:cNvSpPr txBox="1"/>
-          <p:nvPr/>
-        </p:nvSpPr>
-        <p:spPr>
-          <a:xfrm>
-            <a:off x="731520" y="6400800"/>
-            <a:ext cx="10728655" cy="320040"/>
-          </a:xfrm>
-          <a:prstGeom prst="rect">
-            <a:avLst/>
-          </a:prstGeom>
-          <a:noFill/>
-        </p:spPr>
-        <p:txBody>
-          <a:bodyPr wrap="none">
-            <a:spAutoFit/>
-          </a:bodyPr>
-          <a:lstStyle/>
-          <a:p>
-            <a:pPr>
-              <a:defRPr sz="900">
-                <a:solidFill>
-                  <a:srgbClr val="94A3B8"/>
-                </a:solidFill>
-              </a:defRPr>
-            </a:pPr>
-            <a:r>
-              <a:t>STI West Negros University  •  Jhon Paulo V. Gascon  •  Slide 5 of 11</a:t>
-            </a:r>
-          </a:p>
-        </p:txBody>
-      </p:sp>
-      <p:sp>
-        <p:nvSpPr>
-          <p:cNvPr id="6" name="Rounded Rectangle 5"/>
+              <a:t>Three Resilient Wellness Habits</a:t>
+            </a:r>
+          </a:p>
+        </p:txBody>
+      </p:sp>
+      <p:sp>
+        <p:nvSpPr>
+          <p:cNvPr id="4" name="!!Card_1"/>
           <p:cNvSpPr/>
           <p:nvPr/>
         </p:nvSpPr>
         <p:spPr>
           <a:xfrm>
-            <a:off x="731520" y="2011680"/>
-            <a:ext cx="3413455" cy="3840480"/>
+            <a:off x="731520" y="1645920"/>
+            <a:ext cx="3291840" cy="4114800"/>
           </a:xfrm>
           <a:prstGeom prst="roundRect">
             <a:avLst/>
           </a:prstGeom>
           <a:solidFill>
-            <a:srgbClr val="132A66"/>
+            <a:srgbClr val="2D2669"/>
           </a:solidFill>
           <a:ln w="19050">
             <a:solidFill>
-              <a:srgbClr val="FFB703"/>
+              <a:srgbClr val="F97316"/>
             </a:solidFill>
           </a:ln>
         </p:spPr>
@@ -6435,83 +5794,54 @@
           </a:fontRef>
         </p:style>
         <p:txBody>
-          <a:bodyPr rtlCol="0" anchor="ctr"/>
-          <a:lstStyle/>
-          <a:p>
-            <a:pPr algn="ctr"/>
-          </a:p>
-        </p:txBody>
-      </p:sp>
-      <p:sp>
-        <p:nvSpPr>
-          <p:cNvPr id="7" name="TextBox 6"/>
-          <p:cNvSpPr txBox="1"/>
-          <p:nvPr/>
-        </p:nvSpPr>
-        <p:spPr>
-          <a:xfrm>
-            <a:off x="914400" y="2286000"/>
-            <a:ext cx="3047695" cy="3200400"/>
-          </a:xfrm>
-          <a:prstGeom prst="rect">
-            <a:avLst/>
-          </a:prstGeom>
-          <a:noFill/>
-        </p:spPr>
-        <p:txBody>
-          <a:bodyPr wrap="square">
-            <a:spAutoFit/>
-          </a:bodyPr>
-          <a:lstStyle/>
+          <a:bodyPr rtlCol="0" anchor="ctr" wrap="square"/>
+          <a:lstStyle/>
+          <a:p>
+            <a:pPr algn="ctr">
+              <a:defRPr b="1" sz="1500">
+                <a:solidFill>
+                  <a:srgbClr val="F97316"/>
+                </a:solidFill>
+              </a:defRPr>
+            </a:pPr>
+            <a:r>
+              <a:t>1. Box Breathing (4-4-4-4)</a:t>
+            </a:r>
+          </a:p>
           <a:p>
             <a:pPr>
-              <a:defRPr sz="4800" b="1">
-                <a:solidFill>
-                  <a:srgbClr val="FFB703"/>
+              <a:defRPr sz="1100">
+                <a:solidFill>
+                  <a:srgbClr val="F0F0F0"/>
                 </a:solidFill>
               </a:defRPr>
             </a:pPr>
             <a:r>
-              <a:t>62%</a:t>
-            </a:r>
-          </a:p>
-          <a:p>
-            <a:pPr>
-              <a:spcBef>
-                <a:spcPts val="1600"/>
-              </a:spcBef>
-              <a:defRPr sz="1600">
-                <a:solidFill>
-                  <a:srgbClr val="FFFFFF"/>
-                </a:solidFill>
-              </a:defRPr>
-            </a:pPr>
-            <a:r>
-              <a:t>College students reporting chronic academic fatigue during exam weeks</a:t>
-            </a:r>
-          </a:p>
-        </p:txBody>
-      </p:sp>
-      <p:sp>
-        <p:nvSpPr>
-          <p:cNvPr id="8" name="Rounded Rectangle 7"/>
+              <a:t>Inhale for 4s, hold for 4s, exhale for 4s, hold for 4s. Instantly lowers heart rate and stimulates the vagus nerve.</a:t>
+            </a:r>
+          </a:p>
+        </p:txBody>
+      </p:sp>
+      <p:sp>
+        <p:nvSpPr>
+          <p:cNvPr id="5" name="!!Card_2"/>
           <p:cNvSpPr/>
           <p:nvPr/>
         </p:nvSpPr>
         <p:spPr>
           <a:xfrm>
-            <a:off x="4389120" y="2011680"/>
-            <a:ext cx="3413455" cy="3840480"/>
+            <a:off x="4389120" y="1645920"/>
+            <a:ext cx="3291840" cy="4114800"/>
           </a:xfrm>
           <a:prstGeom prst="roundRect">
             <a:avLst/>
           </a:prstGeom>
           <a:solidFill>
-            <a:srgbClr val="132A66"/>
+            <a:srgbClr val="2D2669"/>
           </a:solidFill>
           <a:ln w="19050">
             <a:solidFill>
-              <a:srgbClr val="FFB703"/>
+              <a:srgbClr val="F97316"/>
             </a:solidFill>
           </a:ln>
         </p:spPr>
@@ -6530,83 +5860,54 @@
           </a:fontRef>
         </p:style>
         <p:txBody>
-          <a:bodyPr rtlCol="0" anchor="ctr"/>
-          <a:lstStyle/>
-          <a:p>
-            <a:pPr algn="ctr"/>
-          </a:p>
-        </p:txBody>
-      </p:sp>
-      <p:sp>
-        <p:nvSpPr>
-          <p:cNvPr id="9" name="TextBox 8"/>
-          <p:cNvSpPr txBox="1"/>
-          <p:nvPr/>
-        </p:nvSpPr>
-        <p:spPr>
-          <a:xfrm>
-            <a:off x="4572000" y="2286000"/>
-            <a:ext cx="3047695" cy="3200400"/>
-          </a:xfrm>
-          <a:prstGeom prst="rect">
-            <a:avLst/>
-          </a:prstGeom>
-          <a:noFill/>
-        </p:spPr>
-        <p:txBody>
-          <a:bodyPr wrap="square">
-            <a:spAutoFit/>
-          </a:bodyPr>
-          <a:lstStyle/>
+          <a:bodyPr rtlCol="0" anchor="ctr" wrap="square"/>
+          <a:lstStyle/>
+          <a:p>
+            <a:pPr algn="ctr">
+              <a:defRPr b="1" sz="1500">
+                <a:solidFill>
+                  <a:srgbClr val="F97316"/>
+                </a:solidFill>
+              </a:defRPr>
+            </a:pPr>
+            <a:r>
+              <a:t>2. Strategic Time-Boxing</a:t>
+            </a:r>
+          </a:p>
           <a:p>
             <a:pPr>
-              <a:defRPr sz="4800" b="1">
-                <a:solidFill>
-                  <a:srgbClr val="FFB703"/>
+              <a:defRPr sz="1100">
+                <a:solidFill>
+                  <a:srgbClr val="F0F0F0"/>
                 </a:solidFill>
               </a:defRPr>
             </a:pPr>
             <a:r>
-              <a:t>40%</a:t>
-            </a:r>
-          </a:p>
-          <a:p>
-            <a:pPr>
-              <a:spcBef>
-                <a:spcPts val="1600"/>
-              </a:spcBef>
-              <a:defRPr sz="1600">
-                <a:solidFill>
-                  <a:srgbClr val="FFFFFF"/>
-                </a:solidFill>
-              </a:defRPr>
-            </a:pPr>
-            <a:r>
-              <a:t>Decline in working memory retention caused by sleep deprivation (&lt;6 hrs)</a:t>
-            </a:r>
-          </a:p>
-        </p:txBody>
-      </p:sp>
-      <p:sp>
-        <p:nvSpPr>
-          <p:cNvPr id="10" name="Rounded Rectangle 9"/>
+              <a:t>Block mandatory 45-minute daily offline windows dedicated exclusively to exercise, music, or nature walks.</a:t>
+            </a:r>
+          </a:p>
+        </p:txBody>
+      </p:sp>
+      <p:sp>
+        <p:nvSpPr>
+          <p:cNvPr id="6" name="!!Card_3"/>
           <p:cNvSpPr/>
           <p:nvPr/>
         </p:nvSpPr>
         <p:spPr>
           <a:xfrm>
-            <a:off x="8046720" y="2011680"/>
-            <a:ext cx="3413455" cy="3840480"/>
+            <a:off x="8046720" y="1645920"/>
+            <a:ext cx="3291840" cy="4114800"/>
           </a:xfrm>
           <a:prstGeom prst="roundRect">
             <a:avLst/>
           </a:prstGeom>
           <a:solidFill>
-            <a:srgbClr val="132A66"/>
+            <a:srgbClr val="2D2669"/>
           </a:solidFill>
           <a:ln w="19050">
             <a:solidFill>
-              <a:srgbClr val="FFB703"/>
+              <a:srgbClr val="F97316"/>
             </a:solidFill>
           </a:ln>
         </p:spPr>
@@ -6625,59 +5926,30 @@
           </a:fontRef>
         </p:style>
         <p:txBody>
-          <a:bodyPr rtlCol="0" anchor="ctr"/>
-          <a:lstStyle/>
-          <a:p>
-            <a:pPr algn="ctr"/>
-          </a:p>
-        </p:txBody>
-      </p:sp>
-      <p:sp>
-        <p:nvSpPr>
-          <p:cNvPr id="11" name="TextBox 10"/>
-          <p:cNvSpPr txBox="1"/>
-          <p:nvPr/>
-        </p:nvSpPr>
-        <p:spPr>
-          <a:xfrm>
-            <a:off x="8229600" y="2286000"/>
-            <a:ext cx="3047695" cy="3200400"/>
-          </a:xfrm>
-          <a:prstGeom prst="rect">
-            <a:avLst/>
-          </a:prstGeom>
-          <a:noFill/>
-        </p:spPr>
-        <p:txBody>
-          <a:bodyPr wrap="square">
-            <a:spAutoFit/>
-          </a:bodyPr>
-          <a:lstStyle/>
+          <a:bodyPr rtlCol="0" anchor="ctr" wrap="square"/>
+          <a:lstStyle/>
+          <a:p>
+            <a:pPr algn="ctr">
+              <a:defRPr b="1" sz="1500">
+                <a:solidFill>
+                  <a:srgbClr val="F97316"/>
+                </a:solidFill>
+              </a:defRPr>
+            </a:pPr>
+            <a:r>
+              <a:t>3. Digital Sunsets</a:t>
+            </a:r>
+          </a:p>
           <a:p>
             <a:pPr>
-              <a:defRPr sz="4800" b="1">
-                <a:solidFill>
-                  <a:srgbClr val="FFB703"/>
+              <a:defRPr sz="1100">
+                <a:solidFill>
+                  <a:srgbClr val="F0F0F0"/>
                 </a:solidFill>
               </a:defRPr>
             </a:pPr>
             <a:r>
-              <a:t>30 Min</a:t>
-            </a:r>
-          </a:p>
-          <a:p>
-            <a:pPr>
-              <a:spcBef>
-                <a:spcPts val="1600"/>
-              </a:spcBef>
-              <a:defRPr sz="1600">
-                <a:solidFill>
-                  <a:srgbClr val="FFFFFF"/>
-                </a:solidFill>
-              </a:defRPr>
-            </a:pPr>
-            <a:r>
-              <a:t>Daily physical activity required to metabolize excess stress hormones</a:t>
+              <a:t>Disconnect from screens 45 minutes prior to sleep to prevent blue light from suppressing melatonin production.</a:t>
             </a:r>
           </a:p>
         </p:txBody>
@@ -6694,7 +5966,7 @@
 </file>
 
 <file path=ppt/slides/slide6.xml><?xml version="1.0" encoding="utf-8"?>
-<p:sld xmlns:a="http://schemas.openxmlformats.org/drawingml/2006/main" xmlns:p="http://schemas.openxmlformats.org/presentationml/2006/main" xmlns:r="http://schemas.openxmlformats.org/officeDocument/2006/relationships">
+<p:sld xmlns:p14="http://schemas.microsoft.com/office/powerpoint/2010/main" xmlns:a="http://schemas.openxmlformats.org/drawingml/2006/main" xmlns:p="http://schemas.openxmlformats.org/presentationml/2006/main" xmlns:r="http://schemas.openxmlformats.org/officeDocument/2006/relationships">
   <p:cSld>
     <p:spTree>
       <p:nvGrpSpPr>
@@ -6718,7 +5990,7 @@
             <a:avLst/>
           </a:prstGeom>
           <a:solidFill>
-            <a:srgbClr val="0B1F4B"/>
+            <a:srgbClr val="1E1B4B"/>
           </a:solidFill>
           <a:ln>
             <a:noFill/>
@@ -6754,8 +6026,8 @@
         </p:nvSpPr>
         <p:spPr>
           <a:xfrm>
-            <a:off x="731520" y="365760"/>
-            <a:ext cx="10058400" cy="365760"/>
+            <a:off x="731520" y="457200"/>
+            <a:ext cx="10698480" cy="1005840"/>
           </a:xfrm>
           <a:prstGeom prst="rect">
             <a:avLst/>
@@ -6763,7 +6035,7 @@
           <a:noFill/>
         </p:spPr>
         <p:txBody>
-          <a:bodyPr wrap="none">
+          <a:bodyPr wrap="square">
             <a:spAutoFit/>
           </a:bodyPr>
           <a:lstStyle/>
@@ -6771,106 +6043,72 @@
             <a:pPr>
               <a:defRPr sz="1100" b="1">
                 <a:solidFill>
-                  <a:srgbClr val="FFB703"/>
+                  <a:srgbClr val="F97316"/>
                 </a:solidFill>
               </a:defRPr>
             </a:pPr>
             <a:r>
-              <a:t>STRATEGIC FRAMEWORK</a:t>
-            </a:r>
-          </a:p>
-        </p:txBody>
-      </p:sp>
-      <p:sp>
-        <p:nvSpPr>
-          <p:cNvPr id="4" name="TextBox 3"/>
-          <p:cNvSpPr txBox="1"/>
+              <a:t>COGNITIVE REGENERATION</a:t>
+            </a:r>
+          </a:p>
+          <a:p>
+            <a:pPr>
+              <a:defRPr sz="2400" b="1">
+                <a:solidFill>
+                  <a:srgbClr val="FFFFFF"/>
+                </a:solidFill>
+              </a:defRPr>
+            </a:pPr>
+            <a:r>
+              <a:t>Sleep Hygiene &amp; Recovery</a:t>
+            </a:r>
+          </a:p>
+        </p:txBody>
+      </p:sp>
+      <p:pic>
+        <p:nvPicPr>
+          <p:cNvPr id="4" name="!!Content_Image" descr="wellness_sleep.png"/>
+          <p:cNvPicPr>
+            <a:picLocks noChangeAspect="1"/>
+          </p:cNvPicPr>
           <p:nvPr/>
-        </p:nvSpPr>
-        <p:spPr>
-          <a:xfrm>
-            <a:off x="731520" y="685800"/>
-            <a:ext cx="10515600" cy="731520"/>
+        </p:nvPicPr>
+        <p:blipFill>
+          <a:blip r:embed="rId2"/>
+          <a:stretch>
+            <a:fillRect/>
+          </a:stretch>
+        </p:blipFill>
+        <p:spPr>
+          <a:xfrm>
+            <a:off x="731520" y="1645920"/>
+            <a:ext cx="5029200" cy="4389120"/>
           </a:xfrm>
           <a:prstGeom prst="rect">
             <a:avLst/>
           </a:prstGeom>
-          <a:noFill/>
-        </p:spPr>
-        <p:txBody>
-          <a:bodyPr wrap="none">
-            <a:spAutoFit/>
-          </a:bodyPr>
-          <a:lstStyle/>
-          <a:p>
-            <a:pPr>
-              <a:defRPr sz="2600" b="1">
-                <a:solidFill>
-                  <a:srgbClr val="FFFFFF"/>
-                </a:solidFill>
-              </a:defRPr>
-            </a:pPr>
-            <a:r>
-              <a:t>Three Dimensions of Student Wellness</a:t>
-            </a:r>
-          </a:p>
-        </p:txBody>
-      </p:sp>
-      <p:sp>
-        <p:nvSpPr>
-          <p:cNvPr id="5" name="TextBox 4"/>
-          <p:cNvSpPr txBox="1"/>
-          <p:nvPr/>
-        </p:nvSpPr>
-        <p:spPr>
-          <a:xfrm>
-            <a:off x="731520" y="6400800"/>
-            <a:ext cx="10728655" cy="320040"/>
-          </a:xfrm>
-          <a:prstGeom prst="rect">
-            <a:avLst/>
-          </a:prstGeom>
-          <a:noFill/>
-        </p:spPr>
-        <p:txBody>
-          <a:bodyPr wrap="none">
-            <a:spAutoFit/>
-          </a:bodyPr>
-          <a:lstStyle/>
-          <a:p>
-            <a:pPr>
-              <a:defRPr sz="900">
-                <a:solidFill>
-                  <a:srgbClr val="94A3B8"/>
-                </a:solidFill>
-              </a:defRPr>
-            </a:pPr>
-            <a:r>
-              <a:t>STI West Negros University  •  Jhon Paulo V. Gascon  •  Slide 6 of 11</a:t>
-            </a:r>
-          </a:p>
-        </p:txBody>
-      </p:sp>
-      <p:sp>
-        <p:nvSpPr>
-          <p:cNvPr id="6" name="Rounded Rectangle 5"/>
+        </p:spPr>
+      </p:pic>
+      <p:sp>
+        <p:nvSpPr>
+          <p:cNvPr id="5" name="!!Card_1"/>
           <p:cNvSpPr/>
           <p:nvPr/>
         </p:nvSpPr>
         <p:spPr>
           <a:xfrm>
-            <a:off x="731520" y="2011680"/>
-            <a:ext cx="3413455" cy="3840480"/>
+            <a:off x="6126480" y="1645920"/>
+            <a:ext cx="5303520" cy="1280160"/>
           </a:xfrm>
           <a:prstGeom prst="roundRect">
             <a:avLst/>
           </a:prstGeom>
           <a:solidFill>
-            <a:srgbClr val="132A66"/>
+            <a:srgbClr val="2D2669"/>
           </a:solidFill>
-          <a:ln w="19050">
+          <a:ln w="12700">
             <a:solidFill>
-              <a:srgbClr val="1E5BFF"/>
+              <a:srgbClr val="F97316"/>
             </a:solidFill>
           </a:ln>
         </p:spPr>
@@ -6889,83 +6127,54 @@
           </a:fontRef>
         </p:style>
         <p:txBody>
-          <a:bodyPr rtlCol="0" anchor="ctr"/>
-          <a:lstStyle/>
-          <a:p>
-            <a:pPr algn="ctr"/>
-          </a:p>
-        </p:txBody>
-      </p:sp>
-      <p:sp>
-        <p:nvSpPr>
-          <p:cNvPr id="7" name="TextBox 6"/>
-          <p:cNvSpPr txBox="1"/>
-          <p:nvPr/>
-        </p:nvSpPr>
-        <p:spPr>
-          <a:xfrm>
-            <a:off x="914400" y="2286000"/>
-            <a:ext cx="3047695" cy="3200400"/>
-          </a:xfrm>
-          <a:prstGeom prst="rect">
-            <a:avLst/>
-          </a:prstGeom>
-          <a:noFill/>
-        </p:spPr>
-        <p:txBody>
-          <a:bodyPr wrap="square">
-            <a:spAutoFit/>
-          </a:bodyPr>
-          <a:lstStyle/>
+          <a:bodyPr rtlCol="0" anchor="ctr" wrap="square"/>
+          <a:lstStyle/>
+          <a:p>
+            <a:pPr algn="ctr">
+              <a:defRPr b="1" sz="1300">
+                <a:solidFill>
+                  <a:srgbClr val="FFFFFF"/>
+                </a:solidFill>
+              </a:defRPr>
+            </a:pPr>
+            <a:r>
+              <a:t>REM Memory Consolidation</a:t>
+            </a:r>
+          </a:p>
           <a:p>
             <a:pPr>
-              <a:defRPr sz="2000" b="1">
-                <a:solidFill>
-                  <a:srgbClr val="FFB703"/>
+              <a:defRPr sz="1050">
+                <a:solidFill>
+                  <a:srgbClr val="F5F0FF"/>
                 </a:solidFill>
               </a:defRPr>
             </a:pPr>
             <a:r>
-              <a:t>Cognitive Rest</a:t>
-            </a:r>
-          </a:p>
-          <a:p>
-            <a:pPr>
-              <a:spcBef>
-                <a:spcPts val="1400"/>
-              </a:spcBef>
-              <a:defRPr sz="1400">
-                <a:solidFill>
-                  <a:srgbClr val="FFFFFF"/>
-                </a:solidFill>
-              </a:defRPr>
-            </a:pPr>
-            <a:r>
-              <a:t>Disengaging from technical screens to allow the brain's default mode network to consolidate concepts.</a:t>
-            </a:r>
-          </a:p>
-        </p:txBody>
-      </p:sp>
-      <p:sp>
-        <p:nvSpPr>
-          <p:cNvPr id="8" name="Rounded Rectangle 7"/>
+              <a:t>During deep sleep, the brain transfers daytime facts into durable long-term storage.</a:t>
+            </a:r>
+          </a:p>
+        </p:txBody>
+      </p:sp>
+      <p:sp>
+        <p:nvSpPr>
+          <p:cNvPr id="6" name="!!Card_2"/>
           <p:cNvSpPr/>
           <p:nvPr/>
         </p:nvSpPr>
         <p:spPr>
           <a:xfrm>
-            <a:off x="4389120" y="2011680"/>
-            <a:ext cx="3413455" cy="3840480"/>
+            <a:off x="6126480" y="3108960"/>
+            <a:ext cx="5303520" cy="1280160"/>
           </a:xfrm>
           <a:prstGeom prst="roundRect">
             <a:avLst/>
           </a:prstGeom>
           <a:solidFill>
-            <a:srgbClr val="132A66"/>
+            <a:srgbClr val="2D2669"/>
           </a:solidFill>
-          <a:ln w="19050">
+          <a:ln w="12700">
             <a:solidFill>
-              <a:srgbClr val="1E5BFF"/>
+              <a:srgbClr val="F97316"/>
             </a:solidFill>
           </a:ln>
         </p:spPr>
@@ -6984,83 +6193,54 @@
           </a:fontRef>
         </p:style>
         <p:txBody>
-          <a:bodyPr rtlCol="0" anchor="ctr"/>
-          <a:lstStyle/>
-          <a:p>
-            <a:pPr algn="ctr"/>
-          </a:p>
-        </p:txBody>
-      </p:sp>
-      <p:sp>
-        <p:nvSpPr>
-          <p:cNvPr id="9" name="TextBox 8"/>
-          <p:cNvSpPr txBox="1"/>
-          <p:nvPr/>
-        </p:nvSpPr>
-        <p:spPr>
-          <a:xfrm>
-            <a:off x="4572000" y="2286000"/>
-            <a:ext cx="3047695" cy="3200400"/>
-          </a:xfrm>
-          <a:prstGeom prst="rect">
-            <a:avLst/>
-          </a:prstGeom>
-          <a:noFill/>
-        </p:spPr>
-        <p:txBody>
-          <a:bodyPr wrap="square">
-            <a:spAutoFit/>
-          </a:bodyPr>
-          <a:lstStyle/>
+          <a:bodyPr rtlCol="0" anchor="ctr" wrap="square"/>
+          <a:lstStyle/>
+          <a:p>
+            <a:pPr algn="ctr">
+              <a:defRPr b="1" sz="1300">
+                <a:solidFill>
+                  <a:srgbClr val="FFFFFF"/>
+                </a:solidFill>
+              </a:defRPr>
+            </a:pPr>
+            <a:r>
+              <a:t>The Myth of the Productive All-Nighter</a:t>
+            </a:r>
+          </a:p>
           <a:p>
             <a:pPr>
-              <a:defRPr sz="2000" b="1">
-                <a:solidFill>
-                  <a:srgbClr val="FFB703"/>
+              <a:defRPr sz="1050">
+                <a:solidFill>
+                  <a:srgbClr val="F5F0FF"/>
                 </a:solidFill>
               </a:defRPr>
             </a:pPr>
             <a:r>
-              <a:t>Physical Vitality</a:t>
-            </a:r>
-          </a:p>
-          <a:p>
-            <a:pPr>
-              <a:spcBef>
-                <a:spcPts val="1400"/>
-              </a:spcBef>
-              <a:defRPr sz="1400">
-                <a:solidFill>
-                  <a:srgbClr val="FFFFFF"/>
-                </a:solidFill>
-              </a:defRPr>
-            </a:pPr>
-            <a:r>
-              <a:t>Hydration, restorative sleep cycles, and daily movement to flush accumulated cortisol.</a:t>
-            </a:r>
-          </a:p>
-        </p:txBody>
-      </p:sp>
-      <p:sp>
-        <p:nvSpPr>
-          <p:cNvPr id="10" name="Rounded Rectangle 9"/>
+              <a:t>Staying awake past 24 hours induces cognitive deficits equivalent to a 0.10% blood alcohol level.</a:t>
+            </a:r>
+          </a:p>
+        </p:txBody>
+      </p:sp>
+      <p:sp>
+        <p:nvSpPr>
+          <p:cNvPr id="7" name="!!Card_3"/>
           <p:cNvSpPr/>
           <p:nvPr/>
         </p:nvSpPr>
         <p:spPr>
           <a:xfrm>
-            <a:off x="8046720" y="2011680"/>
-            <a:ext cx="3413455" cy="3840480"/>
+            <a:off x="6126480" y="4572000"/>
+            <a:ext cx="5303520" cy="1280160"/>
           </a:xfrm>
           <a:prstGeom prst="roundRect">
             <a:avLst/>
           </a:prstGeom>
           <a:solidFill>
-            <a:srgbClr val="132A66"/>
+            <a:srgbClr val="2D2669"/>
           </a:solidFill>
-          <a:ln w="19050">
+          <a:ln w="12700">
             <a:solidFill>
-              <a:srgbClr val="1E5BFF"/>
+              <a:srgbClr val="F97316"/>
             </a:solidFill>
           </a:ln>
         </p:spPr>
@@ -7079,59 +6259,30 @@
           </a:fontRef>
         </p:style>
         <p:txBody>
-          <a:bodyPr rtlCol="0" anchor="ctr"/>
-          <a:lstStyle/>
-          <a:p>
-            <a:pPr algn="ctr"/>
-          </a:p>
-        </p:txBody>
-      </p:sp>
-      <p:sp>
-        <p:nvSpPr>
-          <p:cNvPr id="11" name="TextBox 10"/>
-          <p:cNvSpPr txBox="1"/>
-          <p:nvPr/>
-        </p:nvSpPr>
-        <p:spPr>
-          <a:xfrm>
-            <a:off x="8229600" y="2286000"/>
-            <a:ext cx="3047695" cy="3200400"/>
-          </a:xfrm>
-          <a:prstGeom prst="rect">
-            <a:avLst/>
-          </a:prstGeom>
-          <a:noFill/>
-        </p:spPr>
-        <p:txBody>
-          <a:bodyPr wrap="square">
-            <a:spAutoFit/>
-          </a:bodyPr>
-          <a:lstStyle/>
+          <a:bodyPr rtlCol="0" anchor="ctr" wrap="square"/>
+          <a:lstStyle/>
+          <a:p>
+            <a:pPr algn="ctr">
+              <a:defRPr b="1" sz="1300">
+                <a:solidFill>
+                  <a:srgbClr val="FFFFFF"/>
+                </a:solidFill>
+              </a:defRPr>
+            </a:pPr>
+            <a:r>
+              <a:t>Consistent Circadian Rhythm</a:t>
+            </a:r>
+          </a:p>
           <a:p>
             <a:pPr>
-              <a:defRPr sz="2000" b="1">
-                <a:solidFill>
-                  <a:srgbClr val="FFB703"/>
+              <a:defRPr sz="1050">
+                <a:solidFill>
+                  <a:srgbClr val="F5F0FF"/>
                 </a:solidFill>
               </a:defRPr>
             </a:pPr>
             <a:r>
-              <a:t>Emotional Safety</a:t>
-            </a:r>
-          </a:p>
-          <a:p>
-            <a:pPr>
-              <a:spcBef>
-                <a:spcPts val="1400"/>
-              </a:spcBef>
-              <a:defRPr sz="1400">
-                <a:solidFill>
-                  <a:srgbClr val="FFFFFF"/>
-                </a:solidFill>
-              </a:defRPr>
-            </a:pPr>
-            <a:r>
-              <a:t>Honest peer support groups where students share struggles without fear of judgment.</a:t>
+              <a:t>Waking and sleeping at consistent hours stabilizes energy metabolism and daytime alertness.</a:t>
             </a:r>
           </a:p>
         </p:txBody>
@@ -7148,7 +6299,7 @@
 </file>
 
 <file path=ppt/slides/slide7.xml><?xml version="1.0" encoding="utf-8"?>
-<p:sld xmlns:a="http://schemas.openxmlformats.org/drawingml/2006/main" xmlns:p="http://schemas.openxmlformats.org/presentationml/2006/main" xmlns:r="http://schemas.openxmlformats.org/officeDocument/2006/relationships">
+<p:sld xmlns:p14="http://schemas.microsoft.com/office/powerpoint/2010/main" xmlns:a="http://schemas.openxmlformats.org/drawingml/2006/main" xmlns:p="http://schemas.openxmlformats.org/presentationml/2006/main" xmlns:r="http://schemas.openxmlformats.org/officeDocument/2006/relationships">
   <p:cSld>
     <p:spTree>
       <p:nvGrpSpPr>
@@ -7172,7 +6323,7 @@
             <a:avLst/>
           </a:prstGeom>
           <a:solidFill>
-            <a:srgbClr val="0B1F4B"/>
+            <a:srgbClr val="1E1B4B"/>
           </a:solidFill>
           <a:ln>
             <a:noFill/>
@@ -7200,16 +6351,40 @@
           </a:p>
         </p:txBody>
       </p:sp>
-      <p:sp>
-        <p:nvSpPr>
-          <p:cNvPr id="3" name="TextBox 2"/>
+      <p:pic>
+        <p:nvPicPr>
+          <p:cNvPr id="3" name="!!Hero_Image" descr="wellness_balance.png"/>
+          <p:cNvPicPr>
+            <a:picLocks noChangeAspect="1"/>
+          </p:cNvPicPr>
+          <p:nvPr/>
+        </p:nvPicPr>
+        <p:blipFill>
+          <a:blip r:embed="rId2"/>
+          <a:stretch>
+            <a:fillRect/>
+          </a:stretch>
+        </p:blipFill>
+        <p:spPr>
+          <a:xfrm>
+            <a:off x="731520" y="914400"/>
+            <a:ext cx="5029200" cy="5029200"/>
+          </a:xfrm>
+          <a:prstGeom prst="rect">
+            <a:avLst/>
+          </a:prstGeom>
+        </p:spPr>
+      </p:pic>
+      <p:sp>
+        <p:nvSpPr>
+          <p:cNvPr id="4" name="!!Title_Card"/>
           <p:cNvSpPr txBox="1"/>
           <p:nvPr/>
         </p:nvSpPr>
         <p:spPr>
           <a:xfrm>
-            <a:off x="731520" y="365760"/>
-            <a:ext cx="10058400" cy="365760"/>
+            <a:off x="6217920" y="2011680"/>
+            <a:ext cx="5303520" cy="3200400"/>
           </a:xfrm>
           <a:prstGeom prst="rect">
             <a:avLst/>
@@ -7217,115 +6392,85 @@
           <a:noFill/>
         </p:spPr>
         <p:txBody>
-          <a:bodyPr wrap="none">
+          <a:bodyPr wrap="square">
             <a:spAutoFit/>
           </a:bodyPr>
           <a:lstStyle/>
           <a:p>
             <a:pPr>
-              <a:defRPr sz="1100" b="1">
-                <a:solidFill>
-                  <a:srgbClr val="FFB703"/>
+              <a:defRPr sz="3200" b="1">
+                <a:solidFill>
+                  <a:srgbClr val="FFFFFF"/>
                 </a:solidFill>
               </a:defRPr>
             </a:pPr>
             <a:r>
-              <a:t>COMPARATIVE ANALYSIS</a:t>
-            </a:r>
-          </a:p>
-        </p:txBody>
-      </p:sp>
-      <p:sp>
-        <p:nvSpPr>
-          <p:cNvPr id="4" name="TextBox 3"/>
-          <p:cNvSpPr txBox="1"/>
+              <a:t>Study-Life Balance Architecture</a:t>
+            </a:r>
+          </a:p>
+          <a:p>
+            <a:pPr>
+              <a:defRPr sz="1600">
+                <a:solidFill>
+                  <a:srgbClr val="F97316"/>
+                </a:solidFill>
+              </a:defRPr>
+            </a:pPr>
+            <a:r>
+              <a:t>Structuring Sustainable Study Schedules for Long-Term Collegiate Stamina</a:t>
+            </a:r>
+          </a:p>
+        </p:txBody>
+      </p:sp>
+    </p:spTree>
+  </p:cSld>
+  <p:clrMapOvr>
+    <a:masterClrMapping/>
+  </p:clrMapOvr>
+  <mc:AlternateContent xmlns:mc="http://schemas.openxmlformats.org/markup-compatibility/2006">
+    <mc:Choice xmlns:p159="http://schemas.microsoft.com/office/powerpoint/2015/09/main" Requires="p159">
+      <p:transition spd="slow" p14:dur="1500">
+        <p159:morph option="byObject"/>
+      </p:transition>
+    </mc:Choice>
+    <mc:Fallback>
+      <p:transition spd="slow">
+        <p:fade/>
+      </p:transition>
+    </mc:Fallback>
+  </mc:AlternateContent>
+</p:sld>
+</file>
+
+<file path=ppt/slides/slide8.xml><?xml version="1.0" encoding="utf-8"?>
+<p:sld xmlns:p14="http://schemas.microsoft.com/office/powerpoint/2010/main" xmlns:a="http://schemas.openxmlformats.org/drawingml/2006/main" xmlns:p="http://schemas.openxmlformats.org/presentationml/2006/main" xmlns:r="http://schemas.openxmlformats.org/officeDocument/2006/relationships">
+  <p:cSld>
+    <p:spTree>
+      <p:nvGrpSpPr>
+        <p:cNvPr id="1" name=""/>
+        <p:cNvGrpSpPr/>
+        <p:nvPr/>
+      </p:nvGrpSpPr>
+      <p:grpSpPr/>
+      <p:sp>
+        <p:nvSpPr>
+          <p:cNvPr id="2" name="Rectangle 1"/>
+          <p:cNvSpPr/>
           <p:nvPr/>
         </p:nvSpPr>
         <p:spPr>
           <a:xfrm>
-            <a:off x="731520" y="685800"/>
-            <a:ext cx="10515600" cy="731520"/>
+            <a:off x="0" y="0"/>
+            <a:ext cx="12191695" cy="6858000"/>
           </a:xfrm>
           <a:prstGeom prst="rect">
             <a:avLst/>
           </a:prstGeom>
-          <a:noFill/>
-        </p:spPr>
-        <p:txBody>
-          <a:bodyPr wrap="none">
-            <a:spAutoFit/>
-          </a:bodyPr>
-          <a:lstStyle/>
-          <a:p>
-            <a:pPr>
-              <a:defRPr sz="2600" b="1">
-                <a:solidFill>
-                  <a:srgbClr val="FFFFFF"/>
-                </a:solidFill>
-              </a:defRPr>
-            </a:pPr>
-            <a:r>
-              <a:t>Healthy High Performance vs Chronic Burnout</a:t>
-            </a:r>
-          </a:p>
-        </p:txBody>
-      </p:sp>
-      <p:sp>
-        <p:nvSpPr>
-          <p:cNvPr id="5" name="TextBox 4"/>
-          <p:cNvSpPr txBox="1"/>
-          <p:nvPr/>
-        </p:nvSpPr>
-        <p:spPr>
-          <a:xfrm>
-            <a:off x="731520" y="6400800"/>
-            <a:ext cx="10728655" cy="320040"/>
-          </a:xfrm>
-          <a:prstGeom prst="rect">
-            <a:avLst/>
-          </a:prstGeom>
-          <a:noFill/>
-        </p:spPr>
-        <p:txBody>
-          <a:bodyPr wrap="none">
-            <a:spAutoFit/>
-          </a:bodyPr>
-          <a:lstStyle/>
-          <a:p>
-            <a:pPr>
-              <a:defRPr sz="900">
-                <a:solidFill>
-                  <a:srgbClr val="94A3B8"/>
-                </a:solidFill>
-              </a:defRPr>
-            </a:pPr>
-            <a:r>
-              <a:t>STI West Negros University  •  Jhon Paulo V. Gascon  •  Slide 7 of 11</a:t>
-            </a:r>
-          </a:p>
-        </p:txBody>
-      </p:sp>
-      <p:sp>
-        <p:nvSpPr>
-          <p:cNvPr id="6" name="Rounded Rectangle 5"/>
-          <p:cNvSpPr/>
-          <p:nvPr/>
-        </p:nvSpPr>
-        <p:spPr>
-          <a:xfrm>
-            <a:off x="731520" y="1828800"/>
-            <a:ext cx="5212080" cy="4114800"/>
-          </a:xfrm>
-          <a:prstGeom prst="roundRect">
-            <a:avLst/>
-          </a:prstGeom>
           <a:solidFill>
-            <a:srgbClr val="132A66"/>
+            <a:srgbClr val="1E1B4B"/>
           </a:solidFill>
-          <a:ln w="25400">
-            <a:solidFill>
-              <a:srgbClr val="FFB703"/>
-            </a:solidFill>
+          <a:ln>
+            <a:noFill/>
           </a:ln>
         </p:spPr>
         <p:style>
@@ -7352,14 +6497,14 @@
       </p:sp>
       <p:sp>
         <p:nvSpPr>
-          <p:cNvPr id="7" name="TextBox 6"/>
+          <p:cNvPr id="3" name="TextBox 2"/>
           <p:cNvSpPr txBox="1"/>
           <p:nvPr/>
         </p:nvSpPr>
         <p:spPr>
           <a:xfrm>
-            <a:off x="914400" y="2011680"/>
-            <a:ext cx="4846320" cy="3657600"/>
+            <a:off x="731520" y="457200"/>
+            <a:ext cx="10698480" cy="1005840"/>
           </a:xfrm>
           <a:prstGeom prst="rect">
             <a:avLst/>
@@ -7373,98 +6518,74 @@
           <a:lstStyle/>
           <a:p>
             <a:pPr>
-              <a:defRPr sz="1800" b="1">
-                <a:solidFill>
-                  <a:srgbClr val="FFB703"/>
+              <a:defRPr sz="1100" b="1">
+                <a:solidFill>
+                  <a:srgbClr val="F97316"/>
                 </a:solidFill>
               </a:defRPr>
             </a:pPr>
             <a:r>
-              <a:t>Sustainable Student Habits</a:t>
+              <a:t>SUPPORT SYSTEMS</a:t>
             </a:r>
           </a:p>
           <a:p>
             <a:pPr>
-              <a:spcBef>
-                <a:spcPts val="800"/>
-              </a:spcBef>
-              <a:defRPr sz="1300">
+              <a:defRPr sz="2400" b="1">
                 <a:solidFill>
                   <a:srgbClr val="FFFFFF"/>
                 </a:solidFill>
               </a:defRPr>
             </a:pPr>
             <a:r>
-              <a:t>•  Prioritizes consistent 7-hour sleep schedules</a:t>
-            </a:r>
-          </a:p>
-          <a:p>
-            <a:pPr>
-              <a:spcBef>
-                <a:spcPts val="800"/>
-              </a:spcBef>
-              <a:defRPr sz="1300">
-                <a:solidFill>
-                  <a:srgbClr val="FFFFFF"/>
-                </a:solidFill>
-              </a:defRPr>
-            </a:pPr>
-            <a:r>
-              <a:t>•  Decomposes projects into structured milestones</a:t>
-            </a:r>
-          </a:p>
-          <a:p>
-            <a:pPr>
-              <a:spcBef>
-                <a:spcPts val="800"/>
-              </a:spcBef>
-              <a:defRPr sz="1300">
-                <a:solidFill>
-                  <a:srgbClr val="FFFFFF"/>
-                </a:solidFill>
-              </a:defRPr>
-            </a:pPr>
-            <a:r>
-              <a:t>•  Communicates boundaries and asks for help early</a:t>
-            </a:r>
-          </a:p>
-          <a:p>
-            <a:pPr>
-              <a:spcBef>
-                <a:spcPts val="800"/>
-              </a:spcBef>
-              <a:defRPr sz="1300">
-                <a:solidFill>
-                  <a:srgbClr val="FFFFFF"/>
-                </a:solidFill>
-              </a:defRPr>
-            </a:pPr>
-            <a:r>
-              <a:t>•  Views failure as constructive diagnostic feedback</a:t>
-            </a:r>
-          </a:p>
-        </p:txBody>
-      </p:sp>
-      <p:sp>
-        <p:nvSpPr>
-          <p:cNvPr id="8" name="Rounded Rectangle 7"/>
+              <a:t>Campus Support &amp; Crisis Networks</a:t>
+            </a:r>
+          </a:p>
+        </p:txBody>
+      </p:sp>
+      <p:pic>
+        <p:nvPicPr>
+          <p:cNvPr id="4" name="!!Content_Image" descr="wellness_support.png"/>
+          <p:cNvPicPr>
+            <a:picLocks noChangeAspect="1"/>
+          </p:cNvPicPr>
+          <p:nvPr/>
+        </p:nvPicPr>
+        <p:blipFill>
+          <a:blip r:embed="rId2"/>
+          <a:stretch>
+            <a:fillRect/>
+          </a:stretch>
+        </p:blipFill>
+        <p:spPr>
+          <a:xfrm>
+            <a:off x="731520" y="1645920"/>
+            <a:ext cx="5029200" cy="4389120"/>
+          </a:xfrm>
+          <a:prstGeom prst="rect">
+            <a:avLst/>
+          </a:prstGeom>
+        </p:spPr>
+      </p:pic>
+      <p:sp>
+        <p:nvSpPr>
+          <p:cNvPr id="5" name="!!Card_1"/>
           <p:cNvSpPr/>
           <p:nvPr/>
         </p:nvSpPr>
         <p:spPr>
           <a:xfrm>
-            <a:off x="6217920" y="1828800"/>
-            <a:ext cx="5212080" cy="4114800"/>
+            <a:off x="6126480" y="1645920"/>
+            <a:ext cx="5303520" cy="1280160"/>
           </a:xfrm>
           <a:prstGeom prst="roundRect">
             <a:avLst/>
           </a:prstGeom>
           <a:solidFill>
-            <a:srgbClr val="132A66"/>
+            <a:srgbClr val="2D2669"/>
           </a:solidFill>
-          <a:ln w="25400">
+          <a:ln w="12700">
             <a:solidFill>
-              <a:srgbClr val="1E5BFF"/>
+              <a:srgbClr val="F97316"/>
             </a:solidFill>
           </a:ln>
         </p:spPr>
@@ -7483,104 +6604,162 @@
           </a:fontRef>
         </p:style>
         <p:txBody>
-          <a:bodyPr rtlCol="0" anchor="ctr"/>
-          <a:lstStyle/>
-          <a:p>
-            <a:pPr algn="ctr"/>
-          </a:p>
-        </p:txBody>
-      </p:sp>
-      <p:sp>
-        <p:nvSpPr>
-          <p:cNvPr id="9" name="TextBox 8"/>
-          <p:cNvSpPr txBox="1"/>
+          <a:bodyPr rtlCol="0" anchor="ctr" wrap="square"/>
+          <a:lstStyle/>
+          <a:p>
+            <a:pPr algn="ctr">
+              <a:defRPr b="1" sz="1300">
+                <a:solidFill>
+                  <a:srgbClr val="FFFFFF"/>
+                </a:solidFill>
+              </a:defRPr>
+            </a:pPr>
+            <a:r>
+              <a:t>STI WNU Guidance Services</a:t>
+            </a:r>
+          </a:p>
+          <a:p>
+            <a:pPr>
+              <a:defRPr sz="1050">
+                <a:solidFill>
+                  <a:srgbClr val="F5F0FF"/>
+                </a:solidFill>
+              </a:defRPr>
+            </a:pPr>
+            <a:r>
+              <a:t>Confidential professional guidance counselors available on the 2nd Floor, Student Affairs Building.</a:t>
+            </a:r>
+          </a:p>
+        </p:txBody>
+      </p:sp>
+      <p:sp>
+        <p:nvSpPr>
+          <p:cNvPr id="6" name="!!Card_2"/>
+          <p:cNvSpPr/>
           <p:nvPr/>
         </p:nvSpPr>
         <p:spPr>
           <a:xfrm>
-            <a:off x="6400800" y="2011680"/>
-            <a:ext cx="4846320" cy="3657600"/>
-          </a:xfrm>
-          <a:prstGeom prst="rect">
+            <a:off x="6126480" y="3108960"/>
+            <a:ext cx="5303520" cy="1280160"/>
+          </a:xfrm>
+          <a:prstGeom prst="roundRect">
             <a:avLst/>
           </a:prstGeom>
-          <a:noFill/>
-        </p:spPr>
-        <p:txBody>
-          <a:bodyPr wrap="square">
-            <a:spAutoFit/>
-          </a:bodyPr>
-          <a:lstStyle/>
+          <a:solidFill>
+            <a:srgbClr val="2D2669"/>
+          </a:solidFill>
+          <a:ln w="12700">
+            <a:solidFill>
+              <a:srgbClr val="F97316"/>
+            </a:solidFill>
+          </a:ln>
+        </p:spPr>
+        <p:style>
+          <a:lnRef idx="1">
+            <a:schemeClr val="accent1"/>
+          </a:lnRef>
+          <a:fillRef idx="3">
+            <a:schemeClr val="accent1"/>
+          </a:fillRef>
+          <a:effectRef idx="2">
+            <a:schemeClr val="accent1"/>
+          </a:effectRef>
+          <a:fontRef idx="minor">
+            <a:schemeClr val="lt1"/>
+          </a:fontRef>
+        </p:style>
+        <p:txBody>
+          <a:bodyPr rtlCol="0" anchor="ctr" wrap="square"/>
+          <a:lstStyle/>
+          <a:p>
+            <a:pPr algn="ctr">
+              <a:defRPr b="1" sz="1300">
+                <a:solidFill>
+                  <a:srgbClr val="FFFFFF"/>
+                </a:solidFill>
+              </a:defRPr>
+            </a:pPr>
+            <a:r>
+              <a:t>Peer Study &amp; Mentorship Circles</a:t>
+            </a:r>
+          </a:p>
           <a:p>
             <a:pPr>
-              <a:defRPr sz="1800" b="1">
-                <a:solidFill>
-                  <a:srgbClr val="1E5BFF"/>
+              <a:defRPr sz="1050">
+                <a:solidFill>
+                  <a:srgbClr val="F5F0FF"/>
                 </a:solidFill>
               </a:defRPr>
             </a:pPr>
             <a:r>
-              <a:t>The Path to Burnout</a:t>
+              <a:t>Collaborating with fellow BSIT classmates distributes academic pressure and prevents isolation.</a:t>
+            </a:r>
+          </a:p>
+        </p:txBody>
+      </p:sp>
+      <p:sp>
+        <p:nvSpPr>
+          <p:cNvPr id="7" name="!!Card_3"/>
+          <p:cNvSpPr/>
+          <p:nvPr/>
+        </p:nvSpPr>
+        <p:spPr>
+          <a:xfrm>
+            <a:off x="6126480" y="4572000"/>
+            <a:ext cx="5303520" cy="1280160"/>
+          </a:xfrm>
+          <a:prstGeom prst="roundRect">
+            <a:avLst/>
+          </a:prstGeom>
+          <a:solidFill>
+            <a:srgbClr val="2D2669"/>
+          </a:solidFill>
+          <a:ln w="12700">
+            <a:solidFill>
+              <a:srgbClr val="F97316"/>
+            </a:solidFill>
+          </a:ln>
+        </p:spPr>
+        <p:style>
+          <a:lnRef idx="1">
+            <a:schemeClr val="accent1"/>
+          </a:lnRef>
+          <a:fillRef idx="3">
+            <a:schemeClr val="accent1"/>
+          </a:fillRef>
+          <a:effectRef idx="2">
+            <a:schemeClr val="accent1"/>
+          </a:effectRef>
+          <a:fontRef idx="minor">
+            <a:schemeClr val="lt1"/>
+          </a:fontRef>
+        </p:style>
+        <p:txBody>
+          <a:bodyPr rtlCol="0" anchor="ctr" wrap="square"/>
+          <a:lstStyle/>
+          <a:p>
+            <a:pPr algn="ctr">
+              <a:defRPr b="1" sz="1300">
+                <a:solidFill>
+                  <a:srgbClr val="FFFFFF"/>
+                </a:solidFill>
+              </a:defRPr>
+            </a:pPr>
+            <a:r>
+              <a:t>National Crisis Hotlines (24/7)</a:t>
             </a:r>
           </a:p>
           <a:p>
             <a:pPr>
-              <a:spcBef>
-                <a:spcPts val="800"/>
-              </a:spcBef>
-              <a:defRPr sz="1300">
-                <a:solidFill>
-                  <a:srgbClr val="FFFFFF"/>
+              <a:defRPr sz="1050">
+                <a:solidFill>
+                  <a:srgbClr val="F5F0FF"/>
                 </a:solidFill>
               </a:defRPr>
             </a:pPr>
             <a:r>
-              <a:t>•  Prides self on all-night cramming sessions</a:t>
-            </a:r>
-          </a:p>
-          <a:p>
-            <a:pPr>
-              <a:spcBef>
-                <a:spcPts val="800"/>
-              </a:spcBef>
-              <a:defRPr sz="1300">
-                <a:solidFill>
-                  <a:srgbClr val="FFFFFF"/>
-                </a:solidFill>
-              </a:defRPr>
-            </a:pPr>
-            <a:r>
-              <a:t>•  Procrastinates until 2 AM deadline panic</a:t>
-            </a:r>
-          </a:p>
-          <a:p>
-            <a:pPr>
-              <a:spcBef>
-                <a:spcPts val="800"/>
-              </a:spcBef>
-              <a:defRPr sz="1300">
-                <a:solidFill>
-                  <a:srgbClr val="FFFFFF"/>
-                </a:solidFill>
-              </a:defRPr>
-            </a:pPr>
-            <a:r>
-              <a:t>•  Isolates self and masks emotional exhaustion</a:t>
-            </a:r>
-          </a:p>
-          <a:p>
-            <a:pPr>
-              <a:spcBef>
-                <a:spcPts val="800"/>
-              </a:spcBef>
-              <a:defRPr sz="1300">
-                <a:solidFill>
-                  <a:srgbClr val="FFFFFF"/>
-                </a:solidFill>
-              </a:defRPr>
-            </a:pPr>
-            <a:r>
-              <a:t>•  Equates self-worth entirely with letter grades</a:t>
+              <a:t>Philippine National Center for Mental Health: Dial 1553 or 0917-899-8727 toll-free anytime.</a:t>
             </a:r>
           </a:p>
         </p:txBody>
@@ -7596,8 +6775,8 @@
 </p:sld>
 </file>
 
-<file path=ppt/slides/slide8.xml><?xml version="1.0" encoding="utf-8"?>
-<p:sld xmlns:a="http://schemas.openxmlformats.org/drawingml/2006/main" xmlns:p="http://schemas.openxmlformats.org/presentationml/2006/main" xmlns:r="http://schemas.openxmlformats.org/officeDocument/2006/relationships">
+<file path=ppt/slides/slide9.xml><?xml version="1.0" encoding="utf-8"?>
+<p:sld xmlns:p14="http://schemas.microsoft.com/office/powerpoint/2010/main" xmlns:a="http://schemas.openxmlformats.org/drawingml/2006/main" xmlns:p="http://schemas.openxmlformats.org/presentationml/2006/main" xmlns:r="http://schemas.openxmlformats.org/officeDocument/2006/relationships">
   <p:cSld>
     <p:spTree>
       <p:nvGrpSpPr>
@@ -7621,7 +6800,7 @@
             <a:avLst/>
           </a:prstGeom>
           <a:solidFill>
-            <a:srgbClr val="0B1F4B"/>
+            <a:srgbClr val="1E1B4B"/>
           </a:solidFill>
           <a:ln>
             <a:noFill/>
@@ -7657,8 +6836,8 @@
         </p:nvSpPr>
         <p:spPr>
           <a:xfrm>
-            <a:off x="731520" y="6400800"/>
-            <a:ext cx="10728655" cy="320040"/>
+            <a:off x="731520" y="457200"/>
+            <a:ext cx="10698480" cy="1005840"/>
           </a:xfrm>
           <a:prstGeom prst="rect">
             <a:avLst/>
@@ -7666,43 +6845,57 @@
           <a:noFill/>
         </p:spPr>
         <p:txBody>
-          <a:bodyPr wrap="none">
+          <a:bodyPr wrap="square">
             <a:spAutoFit/>
           </a:bodyPr>
           <a:lstStyle/>
           <a:p>
             <a:pPr>
-              <a:defRPr sz="900">
-                <a:solidFill>
-                  <a:srgbClr val="94A3B8"/>
+              <a:defRPr sz="1100" b="1">
+                <a:solidFill>
+                  <a:srgbClr val="F97316"/>
                 </a:solidFill>
               </a:defRPr>
             </a:pPr>
             <a:r>
-              <a:t>STI West Negros University  •  Jhon Paulo V. Gascon  •  Slide 8 of 11</a:t>
-            </a:r>
-          </a:p>
-        </p:txBody>
-      </p:sp>
-      <p:sp>
-        <p:nvSpPr>
-          <p:cNvPr id="4" name="Rectangle 3"/>
+              <a:t>HOLISTIC HEALTH</a:t>
+            </a:r>
+          </a:p>
+          <a:p>
+            <a:pPr>
+              <a:defRPr sz="2400" b="1">
+                <a:solidFill>
+                  <a:srgbClr val="FFFFFF"/>
+                </a:solidFill>
+              </a:defRPr>
+            </a:pPr>
+            <a:r>
+              <a:t>The Four Pillars of Student Wellbeing</a:t>
+            </a:r>
+          </a:p>
+        </p:txBody>
+      </p:sp>
+      <p:sp>
+        <p:nvSpPr>
+          <p:cNvPr id="4" name="!!Card_1"/>
           <p:cNvSpPr/>
           <p:nvPr/>
         </p:nvSpPr>
         <p:spPr>
           <a:xfrm>
-            <a:off x="731520" y="2286000"/>
-            <a:ext cx="457200" cy="2560320"/>
-          </a:xfrm>
-          <a:prstGeom prst="rect">
+            <a:off x="731520" y="1645920"/>
+            <a:ext cx="3291840" cy="4114800"/>
+          </a:xfrm>
+          <a:prstGeom prst="roundRect">
             <a:avLst/>
           </a:prstGeom>
           <a:solidFill>
-            <a:srgbClr val="FFB703"/>
+            <a:srgbClr val="2D2669"/>
           </a:solidFill>
-          <a:ln>
-            <a:noFill/>
+          <a:ln w="19050">
+            <a:solidFill>
+              <a:srgbClr val="F97316"/>
+            </a:solidFill>
           </a:ln>
         </p:spPr>
         <p:style>
@@ -7720,79 +6913,162 @@
           </a:fontRef>
         </p:style>
         <p:txBody>
-          <a:bodyPr rtlCol="0" anchor="ctr"/>
-          <a:lstStyle/>
-          <a:p>
-            <a:pPr algn="ctr"/>
-          </a:p>
-        </p:txBody>
-      </p:sp>
-      <p:sp>
-        <p:nvSpPr>
-          <p:cNvPr id="5" name="TextBox 4"/>
-          <p:cNvSpPr txBox="1"/>
+          <a:bodyPr rtlCol="0" anchor="ctr" wrap="square"/>
+          <a:lstStyle/>
+          <a:p>
+            <a:pPr algn="ctr">
+              <a:defRPr b="1" sz="1500">
+                <a:solidFill>
+                  <a:srgbClr val="F97316"/>
+                </a:solidFill>
+              </a:defRPr>
+            </a:pPr>
+            <a:r>
+              <a:t>Physical Pillar</a:t>
+            </a:r>
+          </a:p>
+          <a:p>
+            <a:pPr>
+              <a:defRPr sz="1100">
+                <a:solidFill>
+                  <a:srgbClr val="F0F0F0"/>
+                </a:solidFill>
+              </a:defRPr>
+            </a:pPr>
+            <a:r>
+              <a:t>Adequate sleep, balanced nutrition, daily hydration, and at least 20 minutes of physical movement.</a:t>
+            </a:r>
+          </a:p>
+        </p:txBody>
+      </p:sp>
+      <p:sp>
+        <p:nvSpPr>
+          <p:cNvPr id="5" name="!!Card_2"/>
+          <p:cNvSpPr/>
           <p:nvPr/>
         </p:nvSpPr>
         <p:spPr>
           <a:xfrm>
-            <a:off x="1463040" y="2194560"/>
-            <a:ext cx="9601200" cy="1371600"/>
-          </a:xfrm>
-          <a:prstGeom prst="rect">
+            <a:off x="4389120" y="1645920"/>
+            <a:ext cx="3291840" cy="4114800"/>
+          </a:xfrm>
+          <a:prstGeom prst="roundRect">
             <a:avLst/>
           </a:prstGeom>
-          <a:noFill/>
-        </p:spPr>
-        <p:txBody>
-          <a:bodyPr wrap="none">
-            <a:spAutoFit/>
-          </a:bodyPr>
-          <a:lstStyle/>
+          <a:solidFill>
+            <a:srgbClr val="2D2669"/>
+          </a:solidFill>
+          <a:ln w="19050">
+            <a:solidFill>
+              <a:srgbClr val="F97316"/>
+            </a:solidFill>
+          </a:ln>
+        </p:spPr>
+        <p:style>
+          <a:lnRef idx="1">
+            <a:schemeClr val="accent1"/>
+          </a:lnRef>
+          <a:fillRef idx="3">
+            <a:schemeClr val="accent1"/>
+          </a:fillRef>
+          <a:effectRef idx="2">
+            <a:schemeClr val="accent1"/>
+          </a:effectRef>
+          <a:fontRef idx="minor">
+            <a:schemeClr val="lt1"/>
+          </a:fontRef>
+        </p:style>
+        <p:txBody>
+          <a:bodyPr rtlCol="0" anchor="ctr" wrap="square"/>
+          <a:lstStyle/>
+          <a:p>
+            <a:pPr algn="ctr">
+              <a:defRPr b="1" sz="1500">
+                <a:solidFill>
+                  <a:srgbClr val="F97316"/>
+                </a:solidFill>
+              </a:defRPr>
+            </a:pPr>
+            <a:r>
+              <a:t>Emotional Pillar</a:t>
+            </a:r>
+          </a:p>
           <a:p>
             <a:pPr>
-              <a:defRPr sz="3800" b="1">
-                <a:solidFill>
-                  <a:srgbClr val="FFFFFF"/>
+              <a:defRPr sz="1100">
+                <a:solidFill>
+                  <a:srgbClr val="F0F0F0"/>
                 </a:solidFill>
               </a:defRPr>
             </a:pPr>
             <a:r>
-              <a:t>Part II: Tactical Self-Care Protocol</a:t>
-            </a:r>
-          </a:p>
-        </p:txBody>
-      </p:sp>
-      <p:sp>
-        <p:nvSpPr>
-          <p:cNvPr id="6" name="TextBox 5"/>
-          <p:cNvSpPr txBox="1"/>
+              <a:t>Self-compassion, mindful breathing, emotional regulation, and acknowledging boundaries.</a:t>
+            </a:r>
+          </a:p>
+        </p:txBody>
+      </p:sp>
+      <p:sp>
+        <p:nvSpPr>
+          <p:cNvPr id="6" name="!!Card_3"/>
+          <p:cNvSpPr/>
           <p:nvPr/>
         </p:nvSpPr>
         <p:spPr>
           <a:xfrm>
-            <a:off x="1463040" y="3657600"/>
-            <a:ext cx="9601200" cy="1371600"/>
-          </a:xfrm>
-          <a:prstGeom prst="rect">
+            <a:off x="8046720" y="1645920"/>
+            <a:ext cx="3291840" cy="4114800"/>
+          </a:xfrm>
+          <a:prstGeom prst="roundRect">
             <a:avLst/>
           </a:prstGeom>
-          <a:noFill/>
-        </p:spPr>
-        <p:txBody>
-          <a:bodyPr wrap="none">
-            <a:spAutoFit/>
-          </a:bodyPr>
-          <a:lstStyle/>
+          <a:solidFill>
+            <a:srgbClr val="2D2669"/>
+          </a:solidFill>
+          <a:ln w="19050">
+            <a:solidFill>
+              <a:srgbClr val="F97316"/>
+            </a:solidFill>
+          </a:ln>
+        </p:spPr>
+        <p:style>
+          <a:lnRef idx="1">
+            <a:schemeClr val="accent1"/>
+          </a:lnRef>
+          <a:fillRef idx="3">
+            <a:schemeClr val="accent1"/>
+          </a:fillRef>
+          <a:effectRef idx="2">
+            <a:schemeClr val="accent1"/>
+          </a:effectRef>
+          <a:fontRef idx="minor">
+            <a:schemeClr val="lt1"/>
+          </a:fontRef>
+        </p:style>
+        <p:txBody>
+          <a:bodyPr rtlCol="0" anchor="ctr" wrap="square"/>
+          <a:lstStyle/>
+          <a:p>
+            <a:pPr algn="ctr">
+              <a:defRPr b="1" sz="1500">
+                <a:solidFill>
+                  <a:srgbClr val="F97316"/>
+                </a:solidFill>
+              </a:defRPr>
+            </a:pPr>
+            <a:r>
+              <a:t>Social Pillar</a:t>
+            </a:r>
+          </a:p>
           <a:p>
             <a:pPr>
-              <a:defRPr sz="2200">
-                <a:solidFill>
-                  <a:srgbClr val="94A3B8"/>
+              <a:defRPr sz="1100">
+                <a:solidFill>
+                  <a:srgbClr val="F0F0F0"/>
                 </a:solidFill>
               </a:defRPr>
             </a:pPr>
             <a:r>
-              <a:t>Daily actionable tools for emotional regulation and balance.</a:t>
+              <a:t>Nurturing genuine friendships, participating in campus organizations, and unplugging from toxic feeds.</a:t>
             </a:r>
           </a:p>
         </p:txBody>
@@ -7802,618 +7078,18 @@
   <p:clrMapOvr>
     <a:masterClrMapping/>
   </p:clrMapOvr>
-  <p:transition spd="med">
-    <p:push dir="u"/>
-  </p:transition>
-</p:sld>
-</file>
-
-<file path=ppt/slides/slide9.xml><?xml version="1.0" encoding="utf-8"?>
-<p:sld xmlns:a="http://schemas.openxmlformats.org/drawingml/2006/main" xmlns:p="http://schemas.openxmlformats.org/presentationml/2006/main" xmlns:r="http://schemas.openxmlformats.org/officeDocument/2006/relationships">
-  <p:cSld>
-    <p:spTree>
-      <p:nvGrpSpPr>
-        <p:cNvPr id="1" name=""/>
-        <p:cNvGrpSpPr/>
-        <p:nvPr/>
-      </p:nvGrpSpPr>
-      <p:grpSpPr/>
-      <p:sp>
-        <p:nvSpPr>
-          <p:cNvPr id="2" name="Rectangle 1"/>
-          <p:cNvSpPr/>
-          <p:nvPr/>
-        </p:nvSpPr>
-        <p:spPr>
-          <a:xfrm>
-            <a:off x="0" y="0"/>
-            <a:ext cx="12191695" cy="6858000"/>
-          </a:xfrm>
-          <a:prstGeom prst="rect">
-            <a:avLst/>
-          </a:prstGeom>
-          <a:solidFill>
-            <a:srgbClr val="0B1F4B"/>
-          </a:solidFill>
-          <a:ln>
-            <a:noFill/>
-          </a:ln>
-        </p:spPr>
-        <p:style>
-          <a:lnRef idx="1">
-            <a:schemeClr val="accent1"/>
-          </a:lnRef>
-          <a:fillRef idx="3">
-            <a:schemeClr val="accent1"/>
-          </a:fillRef>
-          <a:effectRef idx="2">
-            <a:schemeClr val="accent1"/>
-          </a:effectRef>
-          <a:fontRef idx="minor">
-            <a:schemeClr val="lt1"/>
-          </a:fontRef>
-        </p:style>
-        <p:txBody>
-          <a:bodyPr rtlCol="0" anchor="ctr"/>
-          <a:lstStyle/>
-          <a:p>
-            <a:pPr algn="ctr"/>
-          </a:p>
-        </p:txBody>
-      </p:sp>
-      <p:sp>
-        <p:nvSpPr>
-          <p:cNvPr id="3" name="TextBox 2"/>
-          <p:cNvSpPr txBox="1"/>
-          <p:nvPr/>
-        </p:nvSpPr>
-        <p:spPr>
-          <a:xfrm>
-            <a:off x="731520" y="365760"/>
-            <a:ext cx="10058400" cy="365760"/>
-          </a:xfrm>
-          <a:prstGeom prst="rect">
-            <a:avLst/>
-          </a:prstGeom>
-          <a:noFill/>
-        </p:spPr>
-        <p:txBody>
-          <a:bodyPr wrap="none">
-            <a:spAutoFit/>
-          </a:bodyPr>
-          <a:lstStyle/>
-          <a:p>
-            <a:pPr>
-              <a:defRPr sz="1100" b="1">
-                <a:solidFill>
-                  <a:srgbClr val="FFB703"/>
-                </a:solidFill>
-              </a:defRPr>
-            </a:pPr>
-            <a:r>
-              <a:t>EXECUTION METHODOLOGY</a:t>
-            </a:r>
-          </a:p>
-        </p:txBody>
-      </p:sp>
-      <p:sp>
-        <p:nvSpPr>
-          <p:cNvPr id="4" name="TextBox 3"/>
-          <p:cNvSpPr txBox="1"/>
-          <p:nvPr/>
-        </p:nvSpPr>
-        <p:spPr>
-          <a:xfrm>
-            <a:off x="731520" y="685800"/>
-            <a:ext cx="10515600" cy="731520"/>
-          </a:xfrm>
-          <a:prstGeom prst="rect">
-            <a:avLst/>
-          </a:prstGeom>
-          <a:noFill/>
-        </p:spPr>
-        <p:txBody>
-          <a:bodyPr wrap="none">
-            <a:spAutoFit/>
-          </a:bodyPr>
-          <a:lstStyle/>
-          <a:p>
-            <a:pPr>
-              <a:defRPr sz="2600" b="1">
-                <a:solidFill>
-                  <a:srgbClr val="FFFFFF"/>
-                </a:solidFill>
-              </a:defRPr>
-            </a:pPr>
-            <a:r>
-              <a:t>The 4-Step Daily Decompression Protocol</a:t>
-            </a:r>
-          </a:p>
-        </p:txBody>
-      </p:sp>
-      <p:sp>
-        <p:nvSpPr>
-          <p:cNvPr id="5" name="TextBox 4"/>
-          <p:cNvSpPr txBox="1"/>
-          <p:nvPr/>
-        </p:nvSpPr>
-        <p:spPr>
-          <a:xfrm>
-            <a:off x="731520" y="6400800"/>
-            <a:ext cx="10728655" cy="320040"/>
-          </a:xfrm>
-          <a:prstGeom prst="rect">
-            <a:avLst/>
-          </a:prstGeom>
-          <a:noFill/>
-        </p:spPr>
-        <p:txBody>
-          <a:bodyPr wrap="none">
-            <a:spAutoFit/>
-          </a:bodyPr>
-          <a:lstStyle/>
-          <a:p>
-            <a:pPr>
-              <a:defRPr sz="900">
-                <a:solidFill>
-                  <a:srgbClr val="94A3B8"/>
-                </a:solidFill>
-              </a:defRPr>
-            </a:pPr>
-            <a:r>
-              <a:t>STI West Negros University  •  Jhon Paulo V. Gascon  •  Slide 9 of 11</a:t>
-            </a:r>
-          </a:p>
-        </p:txBody>
-      </p:sp>
-      <p:sp>
-        <p:nvSpPr>
-          <p:cNvPr id="6" name="Rounded Rectangle 5"/>
-          <p:cNvSpPr/>
-          <p:nvPr/>
-        </p:nvSpPr>
-        <p:spPr>
-          <a:xfrm>
-            <a:off x="731520" y="2011680"/>
-            <a:ext cx="2514600" cy="3840480"/>
-          </a:xfrm>
-          <a:prstGeom prst="roundRect">
-            <a:avLst/>
-          </a:prstGeom>
-          <a:solidFill>
-            <a:srgbClr val="132A66"/>
-          </a:solidFill>
-          <a:ln w="19050">
-            <a:solidFill>
-              <a:srgbClr val="FFB703"/>
-            </a:solidFill>
-          </a:ln>
-        </p:spPr>
-        <p:style>
-          <a:lnRef idx="1">
-            <a:schemeClr val="accent1"/>
-          </a:lnRef>
-          <a:fillRef idx="3">
-            <a:schemeClr val="accent1"/>
-          </a:fillRef>
-          <a:effectRef idx="2">
-            <a:schemeClr val="accent1"/>
-          </a:effectRef>
-          <a:fontRef idx="minor">
-            <a:schemeClr val="lt1"/>
-          </a:fontRef>
-        </p:style>
-        <p:txBody>
-          <a:bodyPr rtlCol="0" anchor="ctr"/>
-          <a:lstStyle/>
-          <a:p>
-            <a:pPr algn="ctr"/>
-          </a:p>
-        </p:txBody>
-      </p:sp>
-      <p:sp>
-        <p:nvSpPr>
-          <p:cNvPr id="7" name="TextBox 6"/>
-          <p:cNvSpPr txBox="1"/>
-          <p:nvPr/>
-        </p:nvSpPr>
-        <p:spPr>
-          <a:xfrm>
-            <a:off x="868680" y="2194560"/>
-            <a:ext cx="2240280" cy="3474720"/>
-          </a:xfrm>
-          <a:prstGeom prst="rect">
-            <a:avLst/>
-          </a:prstGeom>
-          <a:noFill/>
-        </p:spPr>
-        <p:txBody>
-          <a:bodyPr wrap="square">
-            <a:spAutoFit/>
-          </a:bodyPr>
-          <a:lstStyle/>
-          <a:p>
-            <a:pPr>
-              <a:defRPr sz="1300" b="1">
-                <a:solidFill>
-                  <a:srgbClr val="1E5BFF"/>
-                </a:solidFill>
-              </a:defRPr>
-            </a:pPr>
-            <a:r>
-              <a:t>Step 1</a:t>
-            </a:r>
-          </a:p>
-          <a:p>
-            <a:pPr>
-              <a:spcBef>
-                <a:spcPts val="600"/>
-              </a:spcBef>
-              <a:defRPr sz="1600" b="1">
-                <a:solidFill>
-                  <a:srgbClr val="FFFFFF"/>
-                </a:solidFill>
-              </a:defRPr>
-            </a:pPr>
-            <a:r>
-              <a:t>Morning Reset</a:t>
-            </a:r>
-          </a:p>
-          <a:p>
-            <a:pPr>
-              <a:spcBef>
-                <a:spcPts val="800"/>
-              </a:spcBef>
-              <a:defRPr sz="1200">
-                <a:solidFill>
-                  <a:srgbClr val="94A3B8"/>
-                </a:solidFill>
-              </a:defRPr>
-            </a:pPr>
-            <a:r>
-              <a:t>5 minutes of sunlight exposure and hydration before touching digital screens.</a:t>
-            </a:r>
-          </a:p>
-        </p:txBody>
-      </p:sp>
-      <p:sp>
-        <p:nvSpPr>
-          <p:cNvPr id="8" name="Rounded Rectangle 7"/>
-          <p:cNvSpPr/>
-          <p:nvPr/>
-        </p:nvSpPr>
-        <p:spPr>
-          <a:xfrm>
-            <a:off x="3429000" y="2011680"/>
-            <a:ext cx="2514600" cy="3840480"/>
-          </a:xfrm>
-          <a:prstGeom prst="roundRect">
-            <a:avLst/>
-          </a:prstGeom>
-          <a:solidFill>
-            <a:srgbClr val="132A66"/>
-          </a:solidFill>
-          <a:ln w="19050">
-            <a:solidFill>
-              <a:srgbClr val="FFB703"/>
-            </a:solidFill>
-          </a:ln>
-        </p:spPr>
-        <p:style>
-          <a:lnRef idx="1">
-            <a:schemeClr val="accent1"/>
-          </a:lnRef>
-          <a:fillRef idx="3">
-            <a:schemeClr val="accent1"/>
-          </a:fillRef>
-          <a:effectRef idx="2">
-            <a:schemeClr val="accent1"/>
-          </a:effectRef>
-          <a:fontRef idx="minor">
-            <a:schemeClr val="lt1"/>
-          </a:fontRef>
-        </p:style>
-        <p:txBody>
-          <a:bodyPr rtlCol="0" anchor="ctr"/>
-          <a:lstStyle/>
-          <a:p>
-            <a:pPr algn="ctr"/>
-          </a:p>
-        </p:txBody>
-      </p:sp>
-      <p:sp>
-        <p:nvSpPr>
-          <p:cNvPr id="9" name="TextBox 8"/>
-          <p:cNvSpPr txBox="1"/>
-          <p:nvPr/>
-        </p:nvSpPr>
-        <p:spPr>
-          <a:xfrm>
-            <a:off x="3566160" y="2194560"/>
-            <a:ext cx="2240280" cy="3474720"/>
-          </a:xfrm>
-          <a:prstGeom prst="rect">
-            <a:avLst/>
-          </a:prstGeom>
-          <a:noFill/>
-        </p:spPr>
-        <p:txBody>
-          <a:bodyPr wrap="square">
-            <a:spAutoFit/>
-          </a:bodyPr>
-          <a:lstStyle/>
-          <a:p>
-            <a:pPr>
-              <a:defRPr sz="1300" b="1">
-                <a:solidFill>
-                  <a:srgbClr val="1E5BFF"/>
-                </a:solidFill>
-              </a:defRPr>
-            </a:pPr>
-            <a:r>
-              <a:t>Step 2</a:t>
-            </a:r>
-          </a:p>
-          <a:p>
-            <a:pPr>
-              <a:spcBef>
-                <a:spcPts val="600"/>
-              </a:spcBef>
-              <a:defRPr sz="1600" b="1">
-                <a:solidFill>
-                  <a:srgbClr val="FFFFFF"/>
-                </a:solidFill>
-              </a:defRPr>
-            </a:pPr>
-            <a:r>
-              <a:t>Micro-Breaks</a:t>
-            </a:r>
-          </a:p>
-          <a:p>
-            <a:pPr>
-              <a:spcBef>
-                <a:spcPts val="800"/>
-              </a:spcBef>
-              <a:defRPr sz="1200">
-                <a:solidFill>
-                  <a:srgbClr val="94A3B8"/>
-                </a:solidFill>
-              </a:defRPr>
-            </a:pPr>
-            <a:r>
-              <a:t>Engage in boxed breathing between intensive 50-minute laboratory blocks.</a:t>
-            </a:r>
-          </a:p>
-        </p:txBody>
-      </p:sp>
-      <p:sp>
-        <p:nvSpPr>
-          <p:cNvPr id="10" name="Rounded Rectangle 9"/>
-          <p:cNvSpPr/>
-          <p:nvPr/>
-        </p:nvSpPr>
-        <p:spPr>
-          <a:xfrm>
-            <a:off x="6126480" y="2011680"/>
-            <a:ext cx="2514600" cy="3840480"/>
-          </a:xfrm>
-          <a:prstGeom prst="roundRect">
-            <a:avLst/>
-          </a:prstGeom>
-          <a:solidFill>
-            <a:srgbClr val="132A66"/>
-          </a:solidFill>
-          <a:ln w="19050">
-            <a:solidFill>
-              <a:srgbClr val="FFB703"/>
-            </a:solidFill>
-          </a:ln>
-        </p:spPr>
-        <p:style>
-          <a:lnRef idx="1">
-            <a:schemeClr val="accent1"/>
-          </a:lnRef>
-          <a:fillRef idx="3">
-            <a:schemeClr val="accent1"/>
-          </a:fillRef>
-          <a:effectRef idx="2">
-            <a:schemeClr val="accent1"/>
-          </a:effectRef>
-          <a:fontRef idx="minor">
-            <a:schemeClr val="lt1"/>
-          </a:fontRef>
-        </p:style>
-        <p:txBody>
-          <a:bodyPr rtlCol="0" anchor="ctr"/>
-          <a:lstStyle/>
-          <a:p>
-            <a:pPr algn="ctr"/>
-          </a:p>
-        </p:txBody>
-      </p:sp>
-      <p:sp>
-        <p:nvSpPr>
-          <p:cNvPr id="11" name="TextBox 10"/>
-          <p:cNvSpPr txBox="1"/>
-          <p:nvPr/>
-        </p:nvSpPr>
-        <p:spPr>
-          <a:xfrm>
-            <a:off x="6263640" y="2194560"/>
-            <a:ext cx="2240280" cy="3474720"/>
-          </a:xfrm>
-          <a:prstGeom prst="rect">
-            <a:avLst/>
-          </a:prstGeom>
-          <a:noFill/>
-        </p:spPr>
-        <p:txBody>
-          <a:bodyPr wrap="square">
-            <a:spAutoFit/>
-          </a:bodyPr>
-          <a:lstStyle/>
-          <a:p>
-            <a:pPr>
-              <a:defRPr sz="1300" b="1">
-                <a:solidFill>
-                  <a:srgbClr val="1E5BFF"/>
-                </a:solidFill>
-              </a:defRPr>
-            </a:pPr>
-            <a:r>
-              <a:t>Step 3</a:t>
-            </a:r>
-          </a:p>
-          <a:p>
-            <a:pPr>
-              <a:spcBef>
-                <a:spcPts val="600"/>
-              </a:spcBef>
-              <a:defRPr sz="1600" b="1">
-                <a:solidFill>
-                  <a:srgbClr val="FFFFFF"/>
-                </a:solidFill>
-              </a:defRPr>
-            </a:pPr>
-            <a:r>
-              <a:t>Physical Movement</a:t>
-            </a:r>
-          </a:p>
-          <a:p>
-            <a:pPr>
-              <a:spcBef>
-                <a:spcPts val="800"/>
-              </a:spcBef>
-              <a:defRPr sz="1200">
-                <a:solidFill>
-                  <a:srgbClr val="94A3B8"/>
-                </a:solidFill>
-              </a:defRPr>
-            </a:pPr>
-            <a:r>
-              <a:t>20 minutes of walking or stretching to relieve sedentary tension.</a:t>
-            </a:r>
-          </a:p>
-        </p:txBody>
-      </p:sp>
-      <p:sp>
-        <p:nvSpPr>
-          <p:cNvPr id="12" name="Rounded Rectangle 11"/>
-          <p:cNvSpPr/>
-          <p:nvPr/>
-        </p:nvSpPr>
-        <p:spPr>
-          <a:xfrm>
-            <a:off x="8823960" y="2011680"/>
-            <a:ext cx="2514600" cy="3840480"/>
-          </a:xfrm>
-          <a:prstGeom prst="roundRect">
-            <a:avLst/>
-          </a:prstGeom>
-          <a:solidFill>
-            <a:srgbClr val="132A66"/>
-          </a:solidFill>
-          <a:ln w="19050">
-            <a:solidFill>
-              <a:srgbClr val="FFB703"/>
-            </a:solidFill>
-          </a:ln>
-        </p:spPr>
-        <p:style>
-          <a:lnRef idx="1">
-            <a:schemeClr val="accent1"/>
-          </a:lnRef>
-          <a:fillRef idx="3">
-            <a:schemeClr val="accent1"/>
-          </a:fillRef>
-          <a:effectRef idx="2">
-            <a:schemeClr val="accent1"/>
-          </a:effectRef>
-          <a:fontRef idx="minor">
-            <a:schemeClr val="lt1"/>
-          </a:fontRef>
-        </p:style>
-        <p:txBody>
-          <a:bodyPr rtlCol="0" anchor="ctr"/>
-          <a:lstStyle/>
-          <a:p>
-            <a:pPr algn="ctr"/>
-          </a:p>
-        </p:txBody>
-      </p:sp>
-      <p:sp>
-        <p:nvSpPr>
-          <p:cNvPr id="13" name="TextBox 12"/>
-          <p:cNvSpPr txBox="1"/>
-          <p:nvPr/>
-        </p:nvSpPr>
-        <p:spPr>
-          <a:xfrm>
-            <a:off x="8961120" y="2194560"/>
-            <a:ext cx="2240280" cy="3474720"/>
-          </a:xfrm>
-          <a:prstGeom prst="rect">
-            <a:avLst/>
-          </a:prstGeom>
-          <a:noFill/>
-        </p:spPr>
-        <p:txBody>
-          <a:bodyPr wrap="square">
-            <a:spAutoFit/>
-          </a:bodyPr>
-          <a:lstStyle/>
-          <a:p>
-            <a:pPr>
-              <a:defRPr sz="1300" b="1">
-                <a:solidFill>
-                  <a:srgbClr val="1E5BFF"/>
-                </a:solidFill>
-              </a:defRPr>
-            </a:pPr>
-            <a:r>
-              <a:t>Step 4</a:t>
-            </a:r>
-          </a:p>
-          <a:p>
-            <a:pPr>
-              <a:spcBef>
-                <a:spcPts val="600"/>
-              </a:spcBef>
-              <a:defRPr sz="1600" b="1">
-                <a:solidFill>
-                  <a:srgbClr val="FFFFFF"/>
-                </a:solidFill>
-              </a:defRPr>
-            </a:pPr>
-            <a:r>
-              <a:t>Night Curfew</a:t>
-            </a:r>
-          </a:p>
-          <a:p>
-            <a:pPr>
-              <a:spcBef>
-                <a:spcPts val="800"/>
-              </a:spcBef>
-              <a:defRPr sz="1200">
-                <a:solidFill>
-                  <a:srgbClr val="94A3B8"/>
-                </a:solidFill>
-              </a:defRPr>
-            </a:pPr>
-            <a:r>
-              <a:t>Disconnect from social messaging notifications 45 minutes prior to sleep.</a:t>
-            </a:r>
-          </a:p>
-        </p:txBody>
-      </p:sp>
-    </p:spTree>
-  </p:cSld>
-  <p:clrMapOvr>
-    <a:masterClrMapping/>
-  </p:clrMapOvr>
-  <p:transition spd="med">
-    <p:fade/>
-  </p:transition>
+  <mc:AlternateContent xmlns:mc="http://schemas.openxmlformats.org/markup-compatibility/2006">
+    <mc:Choice xmlns:p159="http://schemas.microsoft.com/office/powerpoint/2015/09/main" Requires="p159">
+      <p:transition spd="slow" p14:dur="1500">
+        <p159:morph option="byObject"/>
+      </p:transition>
+    </mc:Choice>
+    <mc:Fallback>
+      <p:transition spd="slow">
+        <p:fade/>
+      </p:transition>
+    </mc:Fallback>
+  </mc:AlternateContent>
 </p:sld>
 </file>
 
